--- a/it/slides/21-Architettura_dei_Calcolatori-Ingresso_Uscita.pptx
+++ b/it/slides/21-Architettura_dei_Calcolatori-Ingresso_Uscita.pptx
@@ -135,19 +135,19 @@
   <p:extLst>
     <p:ext uri="{521415D9-36F7-43E2-AB2F-B90AF26B5E84}">
       <p14:sectionLst xmlns:p14="http://schemas.microsoft.com/office/powerpoint/2010/main">
-        <p14:section name="Apertura" id="{1aff9c32-995e-0475-2956-42a57f08c7b5}">
+        <p14:section name="Apertura" id="{dc842135-3abc-7871-eac1-ae51ef56d9c1}">
           <p14:sldIdLst>
             <p14:sldId id="256"/>
             <p14:sldId id="257"/>
           </p14:sldIdLst>
         </p14:section>
-        <p14:section name="Riscaldamento sulla macchina" id="{c361302a-c054-f9a7-4473-cdaa367f2946}">
+        <p14:section name="Riscaldamento sulla macchina" id="{dabcf093-0009-a03a-e371-3c28e5240bc3}">
           <p14:sldIdLst>
             <p14:sldId id="258"/>
             <p14:sldId id="259"/>
           </p14:sldIdLst>
         </p14:section>
-        <p14:section name="I display" id="{0cc05b16-5fd0-556b-ff4b-b7b2b3e691c6}">
+        <p14:section name="I display" id="{ced68553-23b8-8c5a-bb52-c2e2f77f13f3}">
           <p14:sldIdLst>
             <p14:sldId id="260"/>
             <p14:sldId id="261"/>
@@ -158,7 +158,7 @@
             <p14:sldId id="266"/>
           </p14:sldIdLst>
         </p14:section>
-        <p14:section name="Tastiera e mouse" id="{85a7f319-6d3a-90dd-ba24-43f2990c4e74}">
+        <p14:section name="Tastiera e mouse" id="{3af4a32e-53aa-b767-8aea-975ca88d0b1b}">
           <p14:sldIdLst>
             <p14:sldId id="267"/>
             <p14:sldId id="268"/>
@@ -167,14 +167,14 @@
             <p14:sldId id="271"/>
           </p14:sldIdLst>
         </p14:section>
-        <p14:section name="Le stampanti" id="{9e6953f1-d4f7-f5cc-2068-8c2de8e348cd}">
+        <p14:section name="Le stampanti" id="{334ee685-1300-29a1-0c1c-a62180bfbad6}">
           <p14:sldIdLst>
             <p14:sldId id="272"/>
             <p14:sldId id="273"/>
             <p14:sldId id="274"/>
           </p14:sldIdLst>
         </p14:section>
-        <p14:section name="Ritorno alla macchina" id="{f19b48f3-a726-4b4f-4475-69bab07c79f4}">
+        <p14:section name="Ritorno alla macchina" id="{5a6fb5d7-0bd0-45de-fa40-ddb6ac6bc21b}">
           <p14:sldIdLst>
             <p14:sldId id="275"/>
             <p14:sldId id="276"/>
@@ -2368,7 +2368,7 @@
           <a:p>
             <a:r>
               <a:rPr lang="en-US" dirty="0"/>
-              <a:t>Dieci termini. Cathode-ray tube è il tubo a raggi catodici; backlight è la retroilluminazione. Un pointing device, dispositivo di puntamento, è qualunque dispositivo che, come il mouse, indica una posizione. Le stampanti dot-matrix e ink-jet sono quelle ad aghi e a getto d'inchiostro. Polling è l'interrogazione ciclica, anche se la parola in uso è quella inglese.</a:t>
+              <a:t>Dieci termini. Cathode-ray tube è il tubo a raggi catodici; backlight è la retroilluminazione. Un pointing device, periferica di puntamento, è qualunque dispositivo che, come il mouse, indica una posizione. Le stampanti dot-matrix e ink-jet sono quelle ad aghi e a getto d'inchiostro. Polling è l'interrogazione ciclica, anche se la parola in uso è quella inglese.</a:t>
             </a:r>
             <a:endParaRPr lang="en-US" dirty="0"/>
           </a:p>
@@ -17188,7 +17188,7 @@
                           <a:ea typeface="Calibri" pitchFamily="34" charset="-122"/>
                           <a:cs typeface="Calibri" pitchFamily="34" charset="-120"/>
                         </a:rPr>
-                        <a:t>dispositivo di puntamento</a:t>
+                        <a:t>periferica di puntamento</a:t>
                       </a:r>
                       <a:endParaRPr lang="en-US" sz="2100" dirty="0">
                         <a:latin typeface="Calibri" charset="0"/>

--- a/it/slides/21-Architettura_dei_Calcolatori-Ingresso_Uscita.pptx
+++ b/it/slides/21-Architettura_dei_Calcolatori-Ingresso_Uscita.pptx
@@ -126,13 +126,13 @@
   <p:extLst>
     <p:ext uri="{521415D9-36F7-43E2-AB2F-B90AF26B5E84}">
       <p14:sectionLst xmlns:p14="http://schemas.microsoft.com/office/powerpoint/2010/main">
-        <p14:section name="Apertura" id="{663252f8-29fd-4a47-9978-4e332d4eaab9}">
+        <p14:section name="Apertura" id="{f88ddfae-53ad-0146-e74d-b0c9ffce3f5b}">
           <p14:sldIdLst>
             <p14:sldId id="256"/>
             <p14:sldId id="257"/>
           </p14:sldIdLst>
         </p14:section>
-        <p14:section name="I display" id="{c0a9b18e-2939-d295-aef7-6750edd32520}">
+        <p14:section name="I display" id="{e2f355d4-3c7e-db00-e9b6-cdcf2f86cd89}">
           <p14:sldIdLst>
             <p14:sldId id="258"/>
             <p14:sldId id="259"/>
@@ -142,7 +142,7 @@
             <p14:sldId id="263"/>
           </p14:sldIdLst>
         </p14:section>
-        <p14:section name="Tastiera e mouse" id="{2154fd5a-f498-8e65-f561-37ba6e31200e}">
+        <p14:section name="Tastiera e mouse" id="{0a1792b4-5047-3902-4125-f28f5fda4b5a}">
           <p14:sldIdLst>
             <p14:sldId id="264"/>
             <p14:sldId id="265"/>
@@ -150,13 +150,13 @@
             <p14:sldId id="267"/>
           </p14:sldIdLst>
         </p14:section>
-        <p14:section name="Le stampanti" id="{2b183d40-7132-fa92-bcbb-121d21eea323}">
+        <p14:section name="Le stampanti" id="{de5e3cdc-b33c-0441-fc40-7b0c8a43b011}">
           <p14:sldIdLst>
             <p14:sldId id="268"/>
             <p14:sldId id="269"/>
           </p14:sldIdLst>
         </p14:section>
-        <p14:section name="Ritorno alla macchina" id="{4dce4f64-5268-f08f-64e6-12e99c1f2e19}">
+        <p14:section name="Ritorno alla macchina" id="{469807d8-afe9-5f7d-ec4e-e8d45eefee90}">
           <p14:sldIdLst>
             <p14:sldId id="270"/>
             <p14:sldId id="271"/>
@@ -1016,7 +1016,8 @@
             <a:r>
               <a:rPr lang="en-US" dirty="0"/>
               <a:t>La stampante laser deriva dalla fotocopiatrice. Un tamburo viene caricato a circa mille volt. Un raggio laser, riflesso da uno specchio rotante, scandisce il tamburo per la sua lunghezza, acceso e spento per disegnare una riga di punti; i punti che colpisce perdono la carica. Il toner è attratto dai punti ancora carichi. Il tamburo viene premuto contro la carta e vi trasferisce il toner, che dei rulli riscaldati fissano. Seguite nella figura il percorso della carta. La pagina esiste prima come bitmap nella memoria della stampante.
-Per il docente: Tre slide dell'originale sono fuse in una. La pagina viene prima costruita come bitmap nella memoria della stampante: un frame buffer per la carta.</a:t>
+Per il docente: Tre slide dell'originale sono fuse in una. La pagina viene prima costruita come bitmap nella memoria della stampante: un frame buffer per la carta.
+Immagini: Laser printer-Writing.svg, DMahalko, traced by Stannered, CC BY 3.0, Wikimedia Commons.</a:t>
             </a:r>
             <a:endParaRPr lang="en-US" dirty="0"/>
           </a:p>
@@ -1730,7 +1731,8 @@
             <a:r>
               <a:rPr lang="en-US" dirty="0"/>
               <a:t>Un display grafico è una matrice di punti, i pixel, ciascuno acceso con la propria intensità; un'immagine si compone accendendo e spegnendo i pixel. I primi display mostravano solo caratteri, in bianco e nero. La densità dei pixel dà la risoluzione, i bit per pixel danno il numero di colori, da 256 a sedici milioni e oltre. La dimensione è la lunghezza della diagonale, in pollici. Il display del kit misura 2,8 pollici, con 320 per 240 pixel.
-Per il docente: Il display del kit PRG32: 2,8 pollici, 320 per 240 pixel, 65.536 colori.</a:t>
+Per il docente: Il display del kit PRG32: 2,8 pollici, 320 per 240 pixel, 65.536 colori.
+Immagini: Macintosh 128k transparency.png, Grm wnr, CC BY-SA 3.0, Wikimedia Commons.</a:t>
             </a:r>
             <a:endParaRPr lang="en-US" dirty="0"/>
           </a:p>
@@ -1908,7 +1910,8 @@
             <a:r>
               <a:rPr lang="en-US" dirty="0"/>
               <a:t>Come funziona un CRT. Un catodo, riscaldato fino all'incandescenza, emette elettroni. Un'alta tensione tra catodo e anodo li accelera in un fascio, che altri campi mettono a fuoco. Campi magnetici o elettrici deflettono il fascio, che colpisce un punto dello schermo: la superficie interna è rivestita di fosforo, e il punto si illumina. Facendo scorrere il fascio riga per riga, molte volte al secondo, si dipinge l'intera immagine prima che l'occhio si accorga che i primi punti si sono spenti.
-Per il docente: Lo schema originale aveva le etichette in italiano: griglia, anodo, bobina di deflessione, riscaldatore, catodo, fascio, bobina di focalizzazione, schermo fluorescente.</a:t>
+Per il docente: Lo schema originale aveva le etichette in italiano: griglia, anodo, bobina di deflessione, riscaldatore, catodo, fascio, bobina di focalizzazione, schermo fluorescente.
+Immagini: Tennis For Two on a DuMont Lab Oscilloscope Type 304-A.jpg, Brookhaven National Laboratory, Public domain, Wikimedia Commons.</a:t>
             </a:r>
             <a:endParaRPr lang="en-US" dirty="0"/>
           </a:p>
@@ -1997,7 +2000,8 @@
             <a:r>
               <a:rPr lang="en-US" dirty="0"/>
               <a:t>I display a cristalli liquidi hanno sostituito il tubo quasi ovunque: immagine migliore, meno ingombro, peso e consumo, meno affaticamento per gli occhi. I cristalli liquidi sono molecole organiche che scorrono come un liquido ma conservano una struttura ordinata. Un campo elettrico ne cambia l'orientamento, e con esso il modo in cui ruotano la polarizzazione della luce che li attraversa. L'immagine utile è l'ultima riga della slide: un cristallo è una valvola per la luce, aperta e chiusa da una tensione.
-Per il docente: LCD: liquid crystal display, display a cristalli liquidi.</a:t>
+Per il docente: LCD: liquid crystal display, display a cristalli liquidi.
+Immagini: TN-LCD-schematic-MS-208kB.png, see the file page, CC BY-SA 3.0, Wikimedia Commons.</a:t>
             </a:r>
             <a:endParaRPr lang="en-US" dirty="0"/>
           </a:p>
@@ -2086,7 +2090,8 @@
             <a:r>
               <a:rPr lang="en-US" dirty="0"/>
               <a:t>Dentro un pannello ci sono molte celle, ciascuna con i suoi contatti, poste tra due filtri polarizzatori con assi perpendicolari, e una luce dietro. Quando i cristalli di una cella non sono pilotati ruotano la luce, che quindi supera il filtro anteriore; quando sono pilotati la luce viene bloccata. In uno schermo a colori ogni cella è divisa in tre, con un filtro rosso, uno verde e uno blu: sono i sub-pixel della fotografia, e i tre campi di un colore RGB finiscono lì come tre tensioni.
-Per il docente: Tre sub-pixel per pixel: i campi R, G e B del colore RGB565 della Lezione 04 finiscono qui, come tre tensioni.</a:t>
+Per il docente: Tre sub-pixel per pixel: i campi R, G e B del colore RGB565 della Lezione 04 finiscono qui, come tre tensioni.
+Immagini: Subpixel rendering LCD photo 3e composite.jpg, ALexL33, CC BY-SA 3.0, Wikimedia Commons.</a:t>
             </a:r>
             <a:endParaRPr lang="en-US" dirty="0"/>
           </a:p>
@@ -3294,7 +3299,63 @@
       </p:sp>
       <p:sp>
         <p:nvSpPr>
-          <p:cNvPr id="12" name="Shape 10"/>
+          <p:cNvPr id="12" name="Text 10"/>
+          <p:cNvSpPr txBox="1"/>
+          <p:nvPr/>
+        </p:nvSpPr>
+        <p:spPr>
+          <a:xfrm>
+            <a:off x="4693615" y="566928"/>
+            <a:ext cx="6949440" cy="640080"/>
+          </a:xfrm>
+          <a:prstGeom prst="rect">
+            <a:avLst/>
+          </a:prstGeom>
+          <a:noFill/>
+          <a:ln/>
+        </p:spPr>
+        <p:txBody>
+          <a:bodyPr wrap="square" lIns="0" tIns="0" rIns="0" bIns="0" rtlCol="0" anchor="t"/>
+          <a:lstStyle/>
+          <a:p>
+            <a:pPr algn="r" indent="0" marL="0">
+              <a:buNone/>
+            </a:pPr>
+            <a:r>
+              <a:rPr lang="en-US" sz="1300" dirty="0">
+                <a:solidFill>
+                  <a:srgbClr val="CFE3EA"/>
+                </a:solidFill>
+                <a:latin typeface="Calibri" pitchFamily="34" charset="0"/>
+                <a:ea typeface="Calibri" pitchFamily="34" charset="-122"/>
+                <a:cs typeface="Calibri" pitchFamily="34" charset="-120"/>
+              </a:rPr>
+              <a:t>Presentazione della lezione. I listati, il programma completo e come provarlo sono nella presentazione del codice:</a:t>
+            </a:r>
+            <a:endParaRPr lang="en-US" sz="1300" dirty="0"/>
+          </a:p>
+          <a:p>
+            <a:pPr algn="r" indent="0" marL="0">
+              <a:buNone/>
+            </a:pPr>
+            <a:r>
+              <a:rPr lang="en-US" sz="1300" dirty="0">
+                <a:solidFill>
+                  <a:srgbClr val="CFE3EA"/>
+                </a:solidFill>
+                <a:latin typeface="Calibri" pitchFamily="34" charset="0"/>
+                <a:ea typeface="Calibri" pitchFamily="34" charset="-122"/>
+                <a:cs typeface="Calibri" pitchFamily="34" charset="-120"/>
+              </a:rPr>
+              <a:t>21-Architettura_dei_Calcolatori-Ingresso_Uscita-Codice.pptx</a:t>
+            </a:r>
+            <a:endParaRPr lang="en-US" sz="1300" dirty="0"/>
+          </a:p>
+        </p:txBody>
+      </p:sp>
+      <p:sp>
+        <p:nvSpPr>
+          <p:cNvPr id="13" name="Shape 11"/>
           <p:cNvSpPr/>
           <p:nvPr/>
         </p:nvSpPr>
@@ -3321,7 +3382,7 @@
       </p:sp>
       <p:pic>
         <p:nvPicPr>
-          <p:cNvPr id="13" name="Image 0" descr="/Users/raffaelemontella/devel/riscv-prg32/computer-architecture-with-prg32/tools/assets/lab2_step1_lamps.png">    </p:cNvPr>
+          <p:cNvPr id="14" name="Image 0" descr="/Users/raffaelemontella/devel/riscv-prg32/computer-architecture-with-prg32/tools/assets/lab2_step1_lamps.png">    </p:cNvPr>
           <p:cNvPicPr>
             <a:picLocks noChangeAspect="1"/>
           </p:cNvPicPr>
@@ -7345,8 +7406,8 @@
         </p:blipFill>
         <p:spPr>
           <a:xfrm>
-            <a:off x="7863840" y="2253742"/>
-            <a:ext cx="3779215" cy="2624837"/>
+            <a:off x="7863840" y="1958517"/>
+            <a:ext cx="3779215" cy="3215285"/>
           </a:xfrm>
           <a:prstGeom prst="rect">
             <a:avLst/>
@@ -7386,7 +7447,7 @@
                 <a:ea typeface="Calibri" pitchFamily="34" charset="-122"/>
                 <a:cs typeface="Calibri" pitchFamily="34" charset="-120"/>
               </a:rPr>
-              <a:t>Il percorso della carta in una stampante laser</a:t>
+              <a:t>Il laser scrive la pagina sul tamburo, riga per riga</a:t>
             </a:r>
             <a:endParaRPr lang="en-US" sz="1200" dirty="0"/>
           </a:p>
@@ -15522,8 +15583,8 @@
         </p:blipFill>
         <p:spPr>
           <a:xfrm>
-            <a:off x="7863840" y="1676552"/>
-            <a:ext cx="3779215" cy="3779215"/>
+            <a:off x="7920917" y="1417320"/>
+            <a:ext cx="3665062" cy="4297680"/>
           </a:xfrm>
           <a:prstGeom prst="rect">
             <a:avLst/>
@@ -17502,8 +17563,8 @@
         </p:blipFill>
         <p:spPr>
           <a:xfrm>
-            <a:off x="7863840" y="1783916"/>
-            <a:ext cx="3779215" cy="3564487"/>
+            <a:off x="7863840" y="1888296"/>
+            <a:ext cx="3779215" cy="3355729"/>
           </a:xfrm>
           <a:prstGeom prst="rect">
             <a:avLst/>
@@ -18014,8 +18075,8 @@
         </p:blipFill>
         <p:spPr>
           <a:xfrm>
-            <a:off x="7863840" y="2190813"/>
-            <a:ext cx="3779215" cy="2750695"/>
+            <a:off x="7863840" y="2501447"/>
+            <a:ext cx="3779215" cy="2129427"/>
           </a:xfrm>
           <a:prstGeom prst="rect">
             <a:avLst/>
@@ -18566,8 +18627,8 @@
         </p:blipFill>
         <p:spPr>
           <a:xfrm>
-            <a:off x="7863840" y="1911062"/>
-            <a:ext cx="3779215" cy="3310196"/>
+            <a:off x="8798749" y="1417320"/>
+            <a:ext cx="1909398" cy="4297680"/>
           </a:xfrm>
           <a:prstGeom prst="rect">
             <a:avLst/>

--- a/it/slides/21-Architettura_dei_Calcolatori-Ingresso_Uscita.pptx
+++ b/it/slides/21-Architettura_dei_Calcolatori-Ingresso_Uscita.pptx
@@ -126,13 +126,13 @@
   <p:extLst>
     <p:ext uri="{521415D9-36F7-43E2-AB2F-B90AF26B5E84}">
       <p14:sectionLst xmlns:p14="http://schemas.microsoft.com/office/powerpoint/2010/main">
-        <p14:section name="Apertura" id="{f88ddfae-53ad-0146-e74d-b0c9ffce3f5b}">
+        <p14:section name="Apertura" id="{858bd1af-b5ec-a075-855a-6e99770db307}">
           <p14:sldIdLst>
             <p14:sldId id="256"/>
             <p14:sldId id="257"/>
           </p14:sldIdLst>
         </p14:section>
-        <p14:section name="I display" id="{e2f355d4-3c7e-db00-e9b6-cdcf2f86cd89}">
+        <p14:section name="I display" id="{c1baa7c6-a4e8-f6bc-1758-af75d455d63e}">
           <p14:sldIdLst>
             <p14:sldId id="258"/>
             <p14:sldId id="259"/>
@@ -142,7 +142,7 @@
             <p14:sldId id="263"/>
           </p14:sldIdLst>
         </p14:section>
-        <p14:section name="Tastiera e mouse" id="{0a1792b4-5047-3902-4125-f28f5fda4b5a}">
+        <p14:section name="Tastiera e mouse" id="{0af0686a-20eb-48cc-2065-9dd3bf37fe64}">
           <p14:sldIdLst>
             <p14:sldId id="264"/>
             <p14:sldId id="265"/>
@@ -150,13 +150,13 @@
             <p14:sldId id="267"/>
           </p14:sldIdLst>
         </p14:section>
-        <p14:section name="Le stampanti" id="{de5e3cdc-b33c-0441-fc40-7b0c8a43b011}">
+        <p14:section name="Le stampanti" id="{bca4ce65-7242-6881-c277-08d8a9c68978}">
           <p14:sldIdLst>
             <p14:sldId id="268"/>
             <p14:sldId id="269"/>
           </p14:sldIdLst>
         </p14:section>
-        <p14:section name="Ritorno alla macchina" id="{469807d8-afe9-5f7d-ec4e-e8d45eefee90}">
+        <p14:section name="Ritorno alla macchina" id="{d5f6b8ca-16b8-1603-8283-8e440331a3a7}">
           <p14:sldIdLst>
             <p14:sldId id="270"/>
             <p14:sldId id="271"/>
@@ -571,6 +571,8 @@
             <a:r>
               <a:rPr lang="en-US" dirty="0"/>
               <a:t>Questa lezione riguarda il confine tra la macchina e il mondo: i dispositivi attraverso cui l'informazione entra ed esce. Vedrete come si forma un'immagine su uno schermo, che cosa succede tra un tasto e il processore, che cosa dice un mouse, come funziona una stampante laser. Il filo che li lega è che ciascuno di questi dispositivi, dentro, è fatto di macchine che avete già progettato. E la lezione comincia e finisce sul kit, con il dispositivo che usate dal primo laboratorio: un pulsante.
+Stato di apprendimento: DA COMPRENDERE OGGI, alla fine di questa lezione lo spiegate, lo seguite passo passo e lo applicate da soli; DA UTILIZZARE OGGI, oggi seguite e usate la ricetta; come funziona dentro si spiega più avanti, o non fa parte del corso; DA COMPRENDERE PIÙ AVANTI, riconoscete il nome e lo scopo; lo spiega una lezione successiva. Una slide senza etichetta è contesto: una storia, un esempio, una domanda, un esercizio.
+Stato di apprendimento di questa lezione. DA COMPRENDERE OGGI: polling, interruzioni, DMA; display CRT e LCD; tastiera e mouse; le stampanti. DA UTILIZZARE OGGI: il programma completo, gli strumenti di PRG32 (si usa, non si studia, in questo corso). DA COMPRENDERE PIÙ AVANTI: niente. Una slide senza etichetta è contesto: una storia, un esempio, una domanda, un esercizio.
 Per il docente: Spirale: gli studenti leggono il joystick fin dai primi laboratori; la lezione si apre chiedendo che cosa c'è dietro prg32_input_read, poi tratta i dispositivi classici e i tre modi in cui un processore può gestirli.</a:t>
             </a:r>
             <a:endParaRPr lang="en-US" dirty="0"/>
@@ -660,6 +662,7 @@
             <a:r>
               <a:rPr lang="en-US" dirty="0"/>
               <a:t>Il percorso della pressione di un tasto, da sinistra a destra. I tasti sono interruttori disposti in righe e colonne: premere D chiude un incrocio. Un codificatore trasforma la combinazione di riga e colonna in un codice di n bit. Un registro a scorrimento trasforma quegli n bit in parallelo in n bit in serie. Un'interfaccia seriale, per esempio un controller USB, consegna il codice al bus di sistema e alza un'interruzione. Il codificatore è quello della Lezione 11, il registro a scorrimento quello della Lezione 14: avete progettato ogni blocco di questa slide.
+DA COMPRENDERE OGGI: tastiera e mouse.
 Per il docente: Ogni blocco di questa slide è una macchina che gli studenti hanno già progettato: è il frutto delle Lezioni dalla 11 alla 14.</a:t>
             </a:r>
             <a:endParaRPr lang="en-US" dirty="0"/>
@@ -749,6 +752,7 @@
             <a:r>
               <a:rPr lang="en-US" dirty="0"/>
               <a:t>Il mouse è stato inventato negli anni Sessanta da Douglas Engelbart: una scatola di legno con due ruote sotto e un filo che esce da dietro, come una coda. Le due ruote misuravano il movimento lungo i due assi. Nel mouse meccanico una pallina fa girare due rulli, ciascuno collegato a un contatore. Nel mouse ottico una luce e una minuscola telecamera osservano la superficie sottostante e misurano come si muove. In tutti e tre, il movimento diventa due numeri.
+DA COMPRENDERE OGGI: tastiera e mouse.
 Per il docente: La presentazione originale data il mouse al 1967, l'anno di deposito del brevetto; il primo prototipo è del 1964 e la celebre dimostrazione pubblica del 1968. Contatori: le macchine sequenziali della Lezione 13.</a:t>
             </a:r>
             <a:endParaRPr lang="en-US" dirty="0"/>
@@ -838,6 +842,7 @@
             <a:r>
               <a:rPr lang="en-US" dirty="0"/>
               <a:t>Che cosa invia un mouse. Ogni volta che si sposta di una distanza minima, circa un centesimo di pollice, invia tre byte: lo spostamento lungo x dall'ultimo rapporto, lo spostamento lungo y, e lo stato dei pulsanti. Notate che invia spostamenti, non posizioni: è il programma a tenere la posizione del puntatore, sommando. Dentro, come a destra: due contatori, un registro a scorrimento, un'interfaccia seriale. Il software che parla con il dispositivo è il suo driver di periferica.
+DA COMPRENDERE OGGI: tastiera e mouse.
 Per il docente: La presentazione originale dice che il primo byte riporta lo spostamento «negli ultimi 100 millisecondi»; i mouse moderni riferiscono fino a mille volte al secondo. I byte di spostamento con segno sono numeri in complemento a due (Lezione 05).</a:t>
             </a:r>
             <a:endParaRPr lang="en-US" dirty="0"/>
@@ -927,6 +932,7 @@
             <a:r>
               <a:rPr lang="en-US" dirty="0"/>
               <a:t>Una stampante si descrive con la sua velocità, in righe o pagine al minuto, e con la sua risoluzione, in punti per pollice. Le tecnologie, in ordine storico: le stampanti a margherita e a catena, che battevano caratteri interi e sono in disuso; ad aghi, in cui degli aghi colpiscono un nastro inchiostrato; a getto d'inchiostro, con minuscole gocce; laser. Una stampante è anche un piccolo calcolatore, con processore, memoria e firmware propri.
+DA COMPRENDERE OGGI: le stampanti.
 Per il docente: In inglese: daisy wheel, chain, dot matrix, ink jet, laser.</a:t>
             </a:r>
             <a:endParaRPr lang="en-US" dirty="0"/>
@@ -1016,6 +1022,7 @@
             <a:r>
               <a:rPr lang="en-US" dirty="0"/>
               <a:t>La stampante laser deriva dalla fotocopiatrice. Un tamburo viene caricato a circa mille volt. Un raggio laser, riflesso da uno specchio rotante, scandisce il tamburo per la sua lunghezza, acceso e spento per disegnare una riga di punti; i punti che colpisce perdono la carica. Il toner è attratto dai punti ancora carichi. Il tamburo viene premuto contro la carta e vi trasferisce il toner, che dei rulli riscaldati fissano. Seguite nella figura il percorso della carta. La pagina esiste prima come bitmap nella memoria della stampante.
+DA COMPRENDERE OGGI: le stampanti.
 Per il docente: Tre slide dell'originale sono fuse in una. La pagina viene prima costruita come bitmap nella memoria della stampante: un frame buffer per la carta.
 Immagini: Laser printer-Writing.svg, DMahalko, traced by Stannered, CC BY 3.0, Wikimedia Commons.</a:t>
             </a:r>
@@ -1106,6 +1113,7 @@
             <a:r>
               <a:rPr lang="en-US" dirty="0"/>
               <a:t>I dispositivi del kit in una tabella: per ciascuno, la direzione, il collegamento e le funzioni con cui una cartuccia lo usa. Il joystick e i pulsanti sono ingressi, un interruttore per piedino. Il display è un'uscita su un bus SPI. L'amplificatore con il suo altoparlante è un'uscita su un bus I2S. La radio Wi-Fi e la porta USB lavorano in entrambe le direzioni. Notate che non avete mai toccato direttamente nessuno di questi collegamenti: lo fa il runtime, e vi offre delle funzioni.
+DA COMPRENDERE OGGI: polling, interruzioni, DMA.
 Per il docente: Hardware dal README di PRG32 e da docs/hardware. Un interruttore rimbalza per qualche millisecondo quando viene premuto; campionarlo una volta per frame, ogni poche decine di millisecondi, nasconde il rimbalzo.</a:t>
             </a:r>
             <a:endParaRPr lang="en-US" dirty="0"/>
@@ -1195,6 +1203,7 @@
             <a:r>
               <a:rPr lang="en-US" dirty="0"/>
               <a:t>Tre modi di gestire un dispositivo. Polling: il programma chiede al dispositivo, ancora e ancora, se ha qualcosa; semplice, e uno spreco quando non succede nulla. Interruzioni: il dispositivo chiede attenzione quando gli serve, come nella Lezione 19. Accesso diretto alla memoria, DMA: il dispositivo scambia da solo interi blocchi di dati con la memoria, e il processore viene soltanto avvisato quando ha finito. Sul kit sono all'opera tutti e tre: voi interrogate il joystick, il timer interrompe, il display e l'audio sono alimentati in DMA.
+DA COMPRENDERE OGGI: polling, interruzioni, DMA.
 Per il docente: I/O programmato, I/O a interruzioni e DMA. Sul kit sono all'opera tutti e tre: il vostro gioco interroga il joystick, il timer che cadenza i frame interrompe, il display e l'audio sono alimentati in DMA.</a:t>
             </a:r>
             <a:endParaRPr lang="en-US" dirty="0"/>
@@ -1642,6 +1651,7 @@
             <a:r>
               <a:rPr lang="en-US" dirty="0"/>
               <a:t>Cinque conclusioni. I dispositivi di ingresso/uscita sono una parte fondamentale dei calcolatori. La tecnologia dei display è passata da un fascio di elettroni a un transistor dietro ogni pixel. Tastiera, mouse e stampante sono cambiati poco fuori, e dentro sono fatti di codificatori, contatori e registri a scorrimento. Un dispositivo raggiunge il processore tramite un controller e un bus, ed è gestito con il polling, le interruzioni o il DMA. E sul kit l'intera catena, da un interruttore a un pixel, si può seguire istruzione per istruzione. Ora viene l'ultima parte di Verm1.
+Stato di apprendimento, riepilogo. DA COMPRENDERE OGGI: polling, interruzioni, DMA; display CRT e LCD; tastiera e mouse; le stampanti. DA UTILIZZARE OGGI: il programma completo, gli strumenti di PRG32 (si usa, non si studia, in questo corso). DA COMPRENDERE PIÙ AVANTI: niente. Una slide senza etichetta è contesto: una storia, un esempio, una domanda, un esercizio.
 Per il docente: Poi: Verm1, parte 4: il gioco finito. Quindi la sua pubblicazione sul Cartridge Store.</a:t>
             </a:r>
             <a:endParaRPr lang="en-US" dirty="0"/>
@@ -1731,6 +1741,7 @@
             <a:r>
               <a:rPr lang="en-US" dirty="0"/>
               <a:t>Un display grafico è una matrice di punti, i pixel, ciascuno acceso con la propria intensità; un'immagine si compone accendendo e spegnendo i pixel. I primi display mostravano solo caratteri, in bianco e nero. La densità dei pixel dà la risoluzione, i bit per pixel danno il numero di colori, da 256 a sedici milioni e oltre. La dimensione è la lunghezza della diagonale, in pollici. Il display del kit misura 2,8 pollici, con 320 per 240 pixel.
+DA COMPRENDERE OGGI: display CRT e LCD.
 Per il docente: Il display del kit PRG32: 2,8 pollici, 320 per 240 pixel, 65.536 colori.
 Immagini: Macintosh 128k transparency.png, Grm wnr, CC BY-SA 3.0, Wikimedia Commons.</a:t>
             </a:r>
@@ -1821,6 +1832,7 @@
             <a:r>
               <a:rPr lang="en-US" dirty="0"/>
               <a:t>Il tubo a raggi catodici ha una storia di oltre un secolo. Nasce come strumento di laboratorio con Crookes, negli anni Settanta dell'Ottocento; Braun ne fa un oscilloscopio nel 1897, il suo primo uso pratico; Rosing nel 1907 lo usa per mostrare forme da un segnale ricevuto, la radice della televisione; nel 1934 arriva sul mercato il primo televisore con CRT. Dagli anni Settanta ai Novanta del Novecento è stato il display di ogni terminale e personal computer.
+DA COMPRENDERE OGGI: display CRT e LCD.
 Per il docente: L'ultima riga riassume l'epoca che la presentazione originale illustrava con le immagini di un oscilloscopio e del cabinato di Asteroids (un display vettoriale pilotato da un 6502).</a:t>
             </a:r>
             <a:endParaRPr lang="en-US" dirty="0"/>
@@ -1910,6 +1922,7 @@
             <a:r>
               <a:rPr lang="en-US" dirty="0"/>
               <a:t>Come funziona un CRT. Un catodo, riscaldato fino all'incandescenza, emette elettroni. Un'alta tensione tra catodo e anodo li accelera in un fascio, che altri campi mettono a fuoco. Campi magnetici o elettrici deflettono il fascio, che colpisce un punto dello schermo: la superficie interna è rivestita di fosforo, e il punto si illumina. Facendo scorrere il fascio riga per riga, molte volte al secondo, si dipinge l'intera immagine prima che l'occhio si accorga che i primi punti si sono spenti.
+DA COMPRENDERE OGGI: display CRT e LCD.
 Per il docente: Lo schema originale aveva le etichette in italiano: griglia, anodo, bobina di deflessione, riscaldatore, catodo, fascio, bobina di focalizzazione, schermo fluorescente.
 Immagini: Tennis For Two on a DuMont Lab Oscilloscope Type 304-A.jpg, Brookhaven National Laboratory, Public domain, Wikimedia Commons.</a:t>
             </a:r>
@@ -2000,6 +2013,7 @@
             <a:r>
               <a:rPr lang="en-US" dirty="0"/>
               <a:t>I display a cristalli liquidi hanno sostituito il tubo quasi ovunque: immagine migliore, meno ingombro, peso e consumo, meno affaticamento per gli occhi. I cristalli liquidi sono molecole organiche che scorrono come un liquido ma conservano una struttura ordinata. Un campo elettrico ne cambia l'orientamento, e con esso il modo in cui ruotano la polarizzazione della luce che li attraversa. L'immagine utile è l'ultima riga della slide: un cristallo è una valvola per la luce, aperta e chiusa da una tensione.
+DA COMPRENDERE OGGI: display CRT e LCD.
 Per il docente: LCD: liquid crystal display, display a cristalli liquidi.
 Immagini: TN-LCD-schematic-MS-208kB.png, see the file page, CC BY-SA 3.0, Wikimedia Commons.</a:t>
             </a:r>
@@ -2090,6 +2104,7 @@
             <a:r>
               <a:rPr lang="en-US" dirty="0"/>
               <a:t>Dentro un pannello ci sono molte celle, ciascuna con i suoi contatti, poste tra due filtri polarizzatori con assi perpendicolari, e una luce dietro. Quando i cristalli di una cella non sono pilotati ruotano la luce, che quindi supera il filtro anteriore; quando sono pilotati la luce viene bloccata. In uno schermo a colori ogni cella è divisa in tre, con un filtro rosso, uno verde e uno blu: sono i sub-pixel della fotografia, e i tre campi di un colore RGB finiscono lì come tre tensioni.
+DA COMPRENDERE OGGI: display CRT e LCD.
 Per il docente: Tre sub-pixel per pixel: i campi R, G e B del colore RGB565 della Lezione 04 finiscono qui, come tre tensioni.
 Immagini: Subpixel rendering LCD photo 3e composite.jpg, ALexL33, CC BY-SA 3.0, Wikimedia Commons.</a:t>
             </a:r>
@@ -2180,6 +2195,7 @@
             <a:r>
               <a:rPr lang="en-US" dirty="0"/>
               <a:t>Come si pilotano milioni di celle? Una calcolatrice ha un contatto per segmento, cosa impossibile per uno schermo. Una matrice passiva ha contatti per riga e per colonna: si pilota un solo pixel alla volta, e gli altri devono ricordare da soli il proprio stato, cosa che fanno male; da qui scie e diafonia. Una matrice attiva mette un transistor in ogni cella, in un film sottile sul vetro: il transistor conserva lo stato del suo pixel mentre gli altri vengono aggiornati. È il TFT, la tecnologia del display del kit.
+DA COMPRENDERE OGGI: display CRT e LCD.
 Per il docente: TFT: thin-film transistor, transistor a film sottile. Il display del kit è un pannello TFT con un controller ILI9341. Novità rispetto alla presentazione originale: i display OLED, in cui ogni pixel emette luce propria e non serve retroilluminazione.</a:t>
             </a:r>
             <a:endParaRPr lang="en-US" dirty="0"/>
@@ -2269,6 +2285,7 @@
             <a:r>
               <a:rPr lang="en-US" dirty="0"/>
               <a:t>La tastiera deriva da quella della macchina per scrivere ed è il principale dispositivo per immettere caratteri. I suoi tasti sono raggruppati: alfanumerici, speciali, frecce e funzioni. Ricordate un fatto, già incontrato nella lezione precedente: la tastiera e il video non sono collegati tra loro. Quando una lettera che battete compare sullo schermo, è perché un programma ha letto un codice dalla tastiera e ha disegnato un carattere. Oggi le tastiere si collegano via USB o via radio.
+DA COMPRENDERE OGGI: tastiera e mouse.
 Per il docente: PS/2 era il connettore standard prima di USB. L'eco di un tasto sullo schermo è un programma: leggi un codice, disegna un carattere.</a:t>
             </a:r>
             <a:endParaRPr lang="en-US" dirty="0"/>
@@ -3406,6 +3423,420 @@
       </p:pic>
       <p:sp>
         <p:nvSpPr>
+          <p:cNvPr id="15" name="Shape 12"/>
+          <p:cNvSpPr/>
+          <p:nvPr/>
+        </p:nvSpPr>
+        <p:spPr>
+          <a:xfrm>
+            <a:off x="8910777" y="91440"/>
+            <a:ext cx="2732278" cy="274320"/>
+          </a:xfrm>
+          <a:prstGeom prst="rect">
+            <a:avLst/>
+          </a:prstGeom>
+          <a:solidFill>
+            <a:srgbClr val="F3E8FF"/>
+          </a:solidFill>
+          <a:ln w="12700">
+            <a:solidFill>
+              <a:srgbClr val="7E22CE"/>
+            </a:solidFill>
+            <a:prstDash val="dash"/>
+          </a:ln>
+        </p:spPr>
+      </p:sp>
+      <p:sp>
+        <p:nvSpPr>
+          <p:cNvPr id="16" name="Shape 13"/>
+          <p:cNvSpPr/>
+          <p:nvPr/>
+        </p:nvSpPr>
+        <p:spPr>
+          <a:xfrm>
+            <a:off x="8938209" y="128016"/>
+            <a:ext cx="45720" cy="45720"/>
+          </a:xfrm>
+          <a:prstGeom prst="rect">
+            <a:avLst/>
+          </a:prstGeom>
+          <a:solidFill>
+            <a:srgbClr val="7E22CE"/>
+          </a:solidFill>
+          <a:ln w="12700">
+            <a:solidFill>
+              <a:srgbClr val="7E22CE"/>
+            </a:solidFill>
+            <a:prstDash val="solid"/>
+          </a:ln>
+        </p:spPr>
+      </p:sp>
+      <p:sp>
+        <p:nvSpPr>
+          <p:cNvPr id="17" name="Shape 14"/>
+          <p:cNvSpPr/>
+          <p:nvPr/>
+        </p:nvSpPr>
+        <p:spPr>
+          <a:xfrm>
+            <a:off x="8938209" y="205740"/>
+            <a:ext cx="45720" cy="45720"/>
+          </a:xfrm>
+          <a:prstGeom prst="rect">
+            <a:avLst/>
+          </a:prstGeom>
+          <a:solidFill>
+            <a:srgbClr val="7E22CE"/>
+          </a:solidFill>
+          <a:ln w="12700">
+            <a:solidFill>
+              <a:srgbClr val="7E22CE"/>
+            </a:solidFill>
+            <a:prstDash val="solid"/>
+          </a:ln>
+        </p:spPr>
+      </p:sp>
+      <p:sp>
+        <p:nvSpPr>
+          <p:cNvPr id="18" name="Shape 15"/>
+          <p:cNvSpPr/>
+          <p:nvPr/>
+        </p:nvSpPr>
+        <p:spPr>
+          <a:xfrm>
+            <a:off x="8938209" y="283464"/>
+            <a:ext cx="45720" cy="45720"/>
+          </a:xfrm>
+          <a:prstGeom prst="rect">
+            <a:avLst/>
+          </a:prstGeom>
+          <a:solidFill>
+            <a:srgbClr val="7E22CE"/>
+          </a:solidFill>
+          <a:ln w="12700">
+            <a:solidFill>
+              <a:srgbClr val="7E22CE"/>
+            </a:solidFill>
+            <a:prstDash val="solid"/>
+          </a:ln>
+        </p:spPr>
+      </p:sp>
+      <p:pic>
+        <p:nvPicPr>
+          <p:cNvPr id="19" name="Image 1" descr="preencoded.png">    </p:cNvPr>
+          <p:cNvPicPr>
+            <a:picLocks noChangeAspect="1"/>
+          </p:cNvPicPr>
+          <p:nvPr/>
+        </p:nvPicPr>
+        <p:blipFill>
+          <a:blip r:embed="rId2"/>
+          <a:stretch>
+            <a:fillRect/>
+          </a:stretch>
+        </p:blipFill>
+        <p:spPr>
+          <a:xfrm>
+            <a:off x="9038793" y="128016"/>
+            <a:ext cx="201168" cy="201168"/>
+          </a:xfrm>
+          <a:prstGeom prst="rect">
+            <a:avLst/>
+          </a:prstGeom>
+        </p:spPr>
+      </p:pic>
+      <p:sp>
+        <p:nvSpPr>
+          <p:cNvPr id="20" name="Text 16"/>
+          <p:cNvSpPr txBox="1"/>
+          <p:nvPr/>
+        </p:nvSpPr>
+        <p:spPr>
+          <a:xfrm>
+            <a:off x="9294825" y="91440"/>
+            <a:ext cx="2311654" cy="274320"/>
+          </a:xfrm>
+          <a:prstGeom prst="rect">
+            <a:avLst/>
+          </a:prstGeom>
+          <a:noFill/>
+          <a:ln/>
+        </p:spPr>
+        <p:txBody>
+          <a:bodyPr wrap="square" lIns="0" tIns="0" rIns="0" bIns="0" rtlCol="0" anchor="ctr"/>
+          <a:lstStyle/>
+          <a:p>
+            <a:pPr indent="0" marL="0">
+              <a:buNone/>
+            </a:pPr>
+            <a:r>
+              <a:rPr lang="en-US" sz="1100" b="1" dirty="0">
+                <a:solidFill>
+                  <a:srgbClr val="6B21A8"/>
+                </a:solidFill>
+                <a:latin typeface="Calibri" pitchFamily="34" charset="0"/>
+                <a:ea typeface="Calibri" pitchFamily="34" charset="-122"/>
+                <a:cs typeface="Calibri" pitchFamily="34" charset="-120"/>
+              </a:rPr>
+              <a:t>DA COMPRENDERE PIÙ AVANTI</a:t>
+            </a:r>
+            <a:endParaRPr lang="en-US" sz="1100" dirty="0"/>
+          </a:p>
+        </p:txBody>
+      </p:sp>
+      <p:sp>
+        <p:nvSpPr>
+          <p:cNvPr id="21" name="Shape 17"/>
+          <p:cNvSpPr/>
+          <p:nvPr/>
+        </p:nvSpPr>
+        <p:spPr>
+          <a:xfrm>
+            <a:off x="6675069" y="91440"/>
+            <a:ext cx="2125980" cy="274320"/>
+          </a:xfrm>
+          <a:prstGeom prst="rect">
+            <a:avLst/>
+          </a:prstGeom>
+          <a:solidFill>
+            <a:srgbClr val="FEF3C7"/>
+          </a:solidFill>
+          <a:ln w="12700">
+            <a:solidFill>
+              <a:srgbClr val="B45309"/>
+            </a:solidFill>
+            <a:prstDash val="solid"/>
+          </a:ln>
+        </p:spPr>
+      </p:sp>
+      <p:sp>
+        <p:nvSpPr>
+          <p:cNvPr id="22" name="Shape 18"/>
+          <p:cNvSpPr/>
+          <p:nvPr/>
+        </p:nvSpPr>
+        <p:spPr>
+          <a:xfrm>
+            <a:off x="6675069" y="91440"/>
+            <a:ext cx="27432" cy="274320"/>
+          </a:xfrm>
+          <a:prstGeom prst="rect">
+            <a:avLst/>
+          </a:prstGeom>
+          <a:solidFill>
+            <a:srgbClr val="B45309"/>
+          </a:solidFill>
+          <a:ln w="12700">
+            <a:solidFill>
+              <a:srgbClr val="B45309"/>
+            </a:solidFill>
+            <a:prstDash val="solid"/>
+          </a:ln>
+        </p:spPr>
+      </p:sp>
+      <p:sp>
+        <p:nvSpPr>
+          <p:cNvPr id="23" name="Shape 19"/>
+          <p:cNvSpPr/>
+          <p:nvPr/>
+        </p:nvSpPr>
+        <p:spPr>
+          <a:xfrm>
+            <a:off x="6729933" y="91440"/>
+            <a:ext cx="27432" cy="274320"/>
+          </a:xfrm>
+          <a:prstGeom prst="rect">
+            <a:avLst/>
+          </a:prstGeom>
+          <a:solidFill>
+            <a:srgbClr val="B45309"/>
+          </a:solidFill>
+          <a:ln w="12700">
+            <a:solidFill>
+              <a:srgbClr val="B45309"/>
+            </a:solidFill>
+            <a:prstDash val="solid"/>
+          </a:ln>
+        </p:spPr>
+      </p:sp>
+      <p:pic>
+        <p:nvPicPr>
+          <p:cNvPr id="24" name="Image 2" descr="preencoded.png">    </p:cNvPr>
+          <p:cNvPicPr>
+            <a:picLocks noChangeAspect="1"/>
+          </p:cNvPicPr>
+          <p:nvPr/>
+        </p:nvPicPr>
+        <p:blipFill>
+          <a:blip r:embed="rId3"/>
+          <a:stretch>
+            <a:fillRect/>
+          </a:stretch>
+        </p:blipFill>
+        <p:spPr>
+          <a:xfrm>
+            <a:off x="6803085" y="128016"/>
+            <a:ext cx="201168" cy="201168"/>
+          </a:xfrm>
+          <a:prstGeom prst="rect">
+            <a:avLst/>
+          </a:prstGeom>
+        </p:spPr>
+      </p:pic>
+      <p:sp>
+        <p:nvSpPr>
+          <p:cNvPr id="25" name="Text 20"/>
+          <p:cNvSpPr txBox="1"/>
+          <p:nvPr/>
+        </p:nvSpPr>
+        <p:spPr>
+          <a:xfrm>
+            <a:off x="7059117" y="91440"/>
+            <a:ext cx="1705356" cy="274320"/>
+          </a:xfrm>
+          <a:prstGeom prst="rect">
+            <a:avLst/>
+          </a:prstGeom>
+          <a:noFill/>
+          <a:ln/>
+        </p:spPr>
+        <p:txBody>
+          <a:bodyPr wrap="square" lIns="0" tIns="0" rIns="0" bIns="0" rtlCol="0" anchor="ctr"/>
+          <a:lstStyle/>
+          <a:p>
+            <a:pPr indent="0" marL="0">
+              <a:buNone/>
+            </a:pPr>
+            <a:r>
+              <a:rPr lang="en-US" sz="1100" b="1" dirty="0">
+                <a:solidFill>
+                  <a:srgbClr val="92400E"/>
+                </a:solidFill>
+                <a:latin typeface="Calibri" pitchFamily="34" charset="0"/>
+                <a:ea typeface="Calibri" pitchFamily="34" charset="-122"/>
+                <a:cs typeface="Calibri" pitchFamily="34" charset="-120"/>
+              </a:rPr>
+              <a:t>DA UTILIZZARE OGGI</a:t>
+            </a:r>
+            <a:endParaRPr lang="en-US" sz="1100" dirty="0"/>
+          </a:p>
+        </p:txBody>
+      </p:sp>
+      <p:sp>
+        <p:nvSpPr>
+          <p:cNvPr id="26" name="Shape 21"/>
+          <p:cNvSpPr/>
+          <p:nvPr/>
+        </p:nvSpPr>
+        <p:spPr>
+          <a:xfrm>
+            <a:off x="4352747" y="91440"/>
+            <a:ext cx="2212594" cy="274320"/>
+          </a:xfrm>
+          <a:prstGeom prst="rect">
+            <a:avLst/>
+          </a:prstGeom>
+          <a:solidFill>
+            <a:srgbClr val="E0F2FE"/>
+          </a:solidFill>
+          <a:ln w="12700">
+            <a:solidFill>
+              <a:srgbClr val="0369A1"/>
+            </a:solidFill>
+            <a:prstDash val="solid"/>
+          </a:ln>
+        </p:spPr>
+      </p:sp>
+      <p:sp>
+        <p:nvSpPr>
+          <p:cNvPr id="27" name="Shape 22"/>
+          <p:cNvSpPr/>
+          <p:nvPr/>
+        </p:nvSpPr>
+        <p:spPr>
+          <a:xfrm>
+            <a:off x="4352747" y="91440"/>
+            <a:ext cx="73152" cy="274320"/>
+          </a:xfrm>
+          <a:prstGeom prst="rect">
+            <a:avLst/>
+          </a:prstGeom>
+          <a:solidFill>
+            <a:srgbClr val="0369A1"/>
+          </a:solidFill>
+          <a:ln w="12700">
+            <a:solidFill>
+              <a:srgbClr val="0369A1"/>
+            </a:solidFill>
+            <a:prstDash val="solid"/>
+          </a:ln>
+        </p:spPr>
+      </p:sp>
+      <p:pic>
+        <p:nvPicPr>
+          <p:cNvPr id="28" name="Image 3" descr="preencoded.png">    </p:cNvPr>
+          <p:cNvPicPr>
+            <a:picLocks noChangeAspect="1"/>
+          </p:cNvPicPr>
+          <p:nvPr/>
+        </p:nvPicPr>
+        <p:blipFill>
+          <a:blip r:embed="rId4"/>
+          <a:stretch>
+            <a:fillRect/>
+          </a:stretch>
+        </p:blipFill>
+        <p:spPr>
+          <a:xfrm>
+            <a:off x="4480763" y="128016"/>
+            <a:ext cx="201168" cy="201168"/>
+          </a:xfrm>
+          <a:prstGeom prst="rect">
+            <a:avLst/>
+          </a:prstGeom>
+        </p:spPr>
+      </p:pic>
+      <p:sp>
+        <p:nvSpPr>
+          <p:cNvPr id="29" name="Text 23"/>
+          <p:cNvSpPr txBox="1"/>
+          <p:nvPr/>
+        </p:nvSpPr>
+        <p:spPr>
+          <a:xfrm>
+            <a:off x="4736795" y="91440"/>
+            <a:ext cx="1791970" cy="274320"/>
+          </a:xfrm>
+          <a:prstGeom prst="rect">
+            <a:avLst/>
+          </a:prstGeom>
+          <a:noFill/>
+          <a:ln/>
+        </p:spPr>
+        <p:txBody>
+          <a:bodyPr wrap="square" lIns="0" tIns="0" rIns="0" bIns="0" rtlCol="0" anchor="ctr"/>
+          <a:lstStyle/>
+          <a:p>
+            <a:pPr indent="0" marL="0">
+              <a:buNone/>
+            </a:pPr>
+            <a:r>
+              <a:rPr lang="en-US" sz="1100" b="1" dirty="0">
+                <a:solidFill>
+                  <a:srgbClr val="075985"/>
+                </a:solidFill>
+                <a:latin typeface="Calibri" pitchFamily="34" charset="0"/>
+                <a:ea typeface="Calibri" pitchFamily="34" charset="-122"/>
+                <a:cs typeface="Calibri" pitchFamily="34" charset="-120"/>
+              </a:rPr>
+              <a:t>DA COMPRENDERE OGGI</a:t>
+            </a:r>
+            <a:endParaRPr lang="en-US" sz="1100" dirty="0"/>
+          </a:p>
+        </p:txBody>
+      </p:sp>
+      <p:sp>
+        <p:nvSpPr>
           <p:cNvPr id="25" name="Slide Number Placeholder 0"/>
           <p:cNvSpPr>
             <a:spLocks noGrp="1"/>
@@ -5074,6 +5505,133 @@
       </p:sp>
       <p:sp>
         <p:nvSpPr>
+          <p:cNvPr id="39" name="Shape 37"/>
+          <p:cNvSpPr/>
+          <p:nvPr/>
+        </p:nvSpPr>
+        <p:spPr>
+          <a:xfrm>
+            <a:off x="8182940" y="91440"/>
+            <a:ext cx="3460115" cy="274320"/>
+          </a:xfrm>
+          <a:prstGeom prst="rect">
+            <a:avLst/>
+          </a:prstGeom>
+          <a:solidFill>
+            <a:srgbClr val="E0F2FE"/>
+          </a:solidFill>
+          <a:ln w="12700">
+            <a:solidFill>
+              <a:srgbClr val="0369A1"/>
+            </a:solidFill>
+            <a:prstDash val="solid"/>
+          </a:ln>
+        </p:spPr>
+      </p:sp>
+      <p:sp>
+        <p:nvSpPr>
+          <p:cNvPr id="40" name="Shape 38"/>
+          <p:cNvSpPr/>
+          <p:nvPr/>
+        </p:nvSpPr>
+        <p:spPr>
+          <a:xfrm>
+            <a:off x="8182940" y="91440"/>
+            <a:ext cx="73152" cy="274320"/>
+          </a:xfrm>
+          <a:prstGeom prst="rect">
+            <a:avLst/>
+          </a:prstGeom>
+          <a:solidFill>
+            <a:srgbClr val="0369A1"/>
+          </a:solidFill>
+          <a:ln w="12700">
+            <a:solidFill>
+              <a:srgbClr val="0369A1"/>
+            </a:solidFill>
+            <a:prstDash val="solid"/>
+          </a:ln>
+        </p:spPr>
+      </p:sp>
+      <p:pic>
+        <p:nvPicPr>
+          <p:cNvPr id="41" name="Image 0" descr="preencoded.png">    </p:cNvPr>
+          <p:cNvPicPr>
+            <a:picLocks noChangeAspect="1"/>
+          </p:cNvPicPr>
+          <p:nvPr/>
+        </p:nvPicPr>
+        <p:blipFill>
+          <a:blip r:embed="rId1"/>
+          <a:stretch>
+            <a:fillRect/>
+          </a:stretch>
+        </p:blipFill>
+        <p:spPr>
+          <a:xfrm>
+            <a:off x="8310956" y="128016"/>
+            <a:ext cx="201168" cy="201168"/>
+          </a:xfrm>
+          <a:prstGeom prst="rect">
+            <a:avLst/>
+          </a:prstGeom>
+        </p:spPr>
+      </p:pic>
+      <p:sp>
+        <p:nvSpPr>
+          <p:cNvPr id="42" name="Text 39"/>
+          <p:cNvSpPr txBox="1"/>
+          <p:nvPr/>
+        </p:nvSpPr>
+        <p:spPr>
+          <a:xfrm>
+            <a:off x="8566988" y="91440"/>
+            <a:ext cx="3039491" cy="274320"/>
+          </a:xfrm>
+          <a:prstGeom prst="rect">
+            <a:avLst/>
+          </a:prstGeom>
+          <a:noFill/>
+          <a:ln/>
+        </p:spPr>
+        <p:txBody>
+          <a:bodyPr wrap="square" lIns="0" tIns="0" rIns="0" bIns="0" rtlCol="0" anchor="ctr"/>
+          <a:lstStyle/>
+          <a:p>
+            <a:pPr indent="0" marL="0">
+              <a:buNone/>
+            </a:pPr>
+            <a:r>
+              <a:rPr lang="en-US" sz="1100" b="1" dirty="0">
+                <a:solidFill>
+                  <a:srgbClr val="075985"/>
+                </a:solidFill>
+                <a:latin typeface="Calibri" pitchFamily="34" charset="0"/>
+                <a:ea typeface="Calibri" pitchFamily="34" charset="-122"/>
+                <a:cs typeface="Calibri" pitchFamily="34" charset="-120"/>
+              </a:rPr>
+              <a:t>DA COMPRENDERE OGGI</a:t>
+            </a:r>
+            <a:pPr indent="0" marL="0">
+              <a:buNone/>
+            </a:pPr>
+            <a:r>
+              <a:rPr lang="en-US" sz="1100" dirty="0">
+                <a:solidFill>
+                  <a:srgbClr val="075985"/>
+                </a:solidFill>
+                <a:latin typeface="Calibri" pitchFamily="34" charset="0"/>
+                <a:ea typeface="Calibri" pitchFamily="34" charset="-122"/>
+                <a:cs typeface="Calibri" pitchFamily="34" charset="-120"/>
+              </a:rPr>
+              <a:t> · tastiera e mouse</a:t>
+            </a:r>
+            <a:endParaRPr lang="en-US" sz="1100" dirty="0"/>
+          </a:p>
+        </p:txBody>
+      </p:sp>
+      <p:sp>
+        <p:nvSpPr>
           <p:cNvPr id="25" name="Slide Number Placeholder 0"/>
           <p:cNvSpPr>
             <a:spLocks noGrp="1"/>
@@ -5523,6 +6081,133 @@
       </p:sp>
       <p:sp>
         <p:nvSpPr>
+          <p:cNvPr id="13" name="Shape 11"/>
+          <p:cNvSpPr/>
+          <p:nvPr/>
+        </p:nvSpPr>
+        <p:spPr>
+          <a:xfrm>
+            <a:off x="8182940" y="91440"/>
+            <a:ext cx="3460115" cy="274320"/>
+          </a:xfrm>
+          <a:prstGeom prst="rect">
+            <a:avLst/>
+          </a:prstGeom>
+          <a:solidFill>
+            <a:srgbClr val="E0F2FE"/>
+          </a:solidFill>
+          <a:ln w="12700">
+            <a:solidFill>
+              <a:srgbClr val="0369A1"/>
+            </a:solidFill>
+            <a:prstDash val="solid"/>
+          </a:ln>
+        </p:spPr>
+      </p:sp>
+      <p:sp>
+        <p:nvSpPr>
+          <p:cNvPr id="14" name="Shape 12"/>
+          <p:cNvSpPr/>
+          <p:nvPr/>
+        </p:nvSpPr>
+        <p:spPr>
+          <a:xfrm>
+            <a:off x="8182940" y="91440"/>
+            <a:ext cx="73152" cy="274320"/>
+          </a:xfrm>
+          <a:prstGeom prst="rect">
+            <a:avLst/>
+          </a:prstGeom>
+          <a:solidFill>
+            <a:srgbClr val="0369A1"/>
+          </a:solidFill>
+          <a:ln w="12700">
+            <a:solidFill>
+              <a:srgbClr val="0369A1"/>
+            </a:solidFill>
+            <a:prstDash val="solid"/>
+          </a:ln>
+        </p:spPr>
+      </p:sp>
+      <p:pic>
+        <p:nvPicPr>
+          <p:cNvPr id="15" name="Image 0" descr="preencoded.png">    </p:cNvPr>
+          <p:cNvPicPr>
+            <a:picLocks noChangeAspect="1"/>
+          </p:cNvPicPr>
+          <p:nvPr/>
+        </p:nvPicPr>
+        <p:blipFill>
+          <a:blip r:embed="rId1"/>
+          <a:stretch>
+            <a:fillRect/>
+          </a:stretch>
+        </p:blipFill>
+        <p:spPr>
+          <a:xfrm>
+            <a:off x="8310956" y="128016"/>
+            <a:ext cx="201168" cy="201168"/>
+          </a:xfrm>
+          <a:prstGeom prst="rect">
+            <a:avLst/>
+          </a:prstGeom>
+        </p:spPr>
+      </p:pic>
+      <p:sp>
+        <p:nvSpPr>
+          <p:cNvPr id="16" name="Text 13"/>
+          <p:cNvSpPr txBox="1"/>
+          <p:nvPr/>
+        </p:nvSpPr>
+        <p:spPr>
+          <a:xfrm>
+            <a:off x="8566988" y="91440"/>
+            <a:ext cx="3039491" cy="274320"/>
+          </a:xfrm>
+          <a:prstGeom prst="rect">
+            <a:avLst/>
+          </a:prstGeom>
+          <a:noFill/>
+          <a:ln/>
+        </p:spPr>
+        <p:txBody>
+          <a:bodyPr wrap="square" lIns="0" tIns="0" rIns="0" bIns="0" rtlCol="0" anchor="ctr"/>
+          <a:lstStyle/>
+          <a:p>
+            <a:pPr indent="0" marL="0">
+              <a:buNone/>
+            </a:pPr>
+            <a:r>
+              <a:rPr lang="en-US" sz="1100" b="1" dirty="0">
+                <a:solidFill>
+                  <a:srgbClr val="075985"/>
+                </a:solidFill>
+                <a:latin typeface="Calibri" pitchFamily="34" charset="0"/>
+                <a:ea typeface="Calibri" pitchFamily="34" charset="-122"/>
+                <a:cs typeface="Calibri" pitchFamily="34" charset="-120"/>
+              </a:rPr>
+              <a:t>DA COMPRENDERE OGGI</a:t>
+            </a:r>
+            <a:pPr indent="0" marL="0">
+              <a:buNone/>
+            </a:pPr>
+            <a:r>
+              <a:rPr lang="en-US" sz="1100" dirty="0">
+                <a:solidFill>
+                  <a:srgbClr val="075985"/>
+                </a:solidFill>
+                <a:latin typeface="Calibri" pitchFamily="34" charset="0"/>
+                <a:ea typeface="Calibri" pitchFamily="34" charset="-122"/>
+                <a:cs typeface="Calibri" pitchFamily="34" charset="-120"/>
+              </a:rPr>
+              <a:t> · tastiera e mouse</a:t>
+            </a:r>
+            <a:endParaRPr lang="en-US" sz="1100" dirty="0"/>
+          </a:p>
+        </p:txBody>
+      </p:sp>
+      <p:sp>
+        <p:nvSpPr>
           <p:cNvPr id="25" name="Slide Number Placeholder 0"/>
           <p:cNvSpPr>
             <a:spLocks noGrp="1"/>
@@ -6347,6 +7032,133 @@
       </p:sp>
       <p:sp>
         <p:nvSpPr>
+          <p:cNvPr id="21" name="Shape 19"/>
+          <p:cNvSpPr/>
+          <p:nvPr/>
+        </p:nvSpPr>
+        <p:spPr>
+          <a:xfrm>
+            <a:off x="8182940" y="91440"/>
+            <a:ext cx="3460115" cy="274320"/>
+          </a:xfrm>
+          <a:prstGeom prst="rect">
+            <a:avLst/>
+          </a:prstGeom>
+          <a:solidFill>
+            <a:srgbClr val="E0F2FE"/>
+          </a:solidFill>
+          <a:ln w="12700">
+            <a:solidFill>
+              <a:srgbClr val="0369A1"/>
+            </a:solidFill>
+            <a:prstDash val="solid"/>
+          </a:ln>
+        </p:spPr>
+      </p:sp>
+      <p:sp>
+        <p:nvSpPr>
+          <p:cNvPr id="22" name="Shape 20"/>
+          <p:cNvSpPr/>
+          <p:nvPr/>
+        </p:nvSpPr>
+        <p:spPr>
+          <a:xfrm>
+            <a:off x="8182940" y="91440"/>
+            <a:ext cx="73152" cy="274320"/>
+          </a:xfrm>
+          <a:prstGeom prst="rect">
+            <a:avLst/>
+          </a:prstGeom>
+          <a:solidFill>
+            <a:srgbClr val="0369A1"/>
+          </a:solidFill>
+          <a:ln w="12700">
+            <a:solidFill>
+              <a:srgbClr val="0369A1"/>
+            </a:solidFill>
+            <a:prstDash val="solid"/>
+          </a:ln>
+        </p:spPr>
+      </p:sp>
+      <p:pic>
+        <p:nvPicPr>
+          <p:cNvPr id="23" name="Image 0" descr="preencoded.png">    </p:cNvPr>
+          <p:cNvPicPr>
+            <a:picLocks noChangeAspect="1"/>
+          </p:cNvPicPr>
+          <p:nvPr/>
+        </p:nvPicPr>
+        <p:blipFill>
+          <a:blip r:embed="rId1"/>
+          <a:stretch>
+            <a:fillRect/>
+          </a:stretch>
+        </p:blipFill>
+        <p:spPr>
+          <a:xfrm>
+            <a:off x="8310956" y="128016"/>
+            <a:ext cx="201168" cy="201168"/>
+          </a:xfrm>
+          <a:prstGeom prst="rect">
+            <a:avLst/>
+          </a:prstGeom>
+        </p:spPr>
+      </p:pic>
+      <p:sp>
+        <p:nvSpPr>
+          <p:cNvPr id="24" name="Text 21"/>
+          <p:cNvSpPr txBox="1"/>
+          <p:nvPr/>
+        </p:nvSpPr>
+        <p:spPr>
+          <a:xfrm>
+            <a:off x="8566988" y="91440"/>
+            <a:ext cx="3039491" cy="274320"/>
+          </a:xfrm>
+          <a:prstGeom prst="rect">
+            <a:avLst/>
+          </a:prstGeom>
+          <a:noFill/>
+          <a:ln/>
+        </p:spPr>
+        <p:txBody>
+          <a:bodyPr wrap="square" lIns="0" tIns="0" rIns="0" bIns="0" rtlCol="0" anchor="ctr"/>
+          <a:lstStyle/>
+          <a:p>
+            <a:pPr indent="0" marL="0">
+              <a:buNone/>
+            </a:pPr>
+            <a:r>
+              <a:rPr lang="en-US" sz="1100" b="1" dirty="0">
+                <a:solidFill>
+                  <a:srgbClr val="075985"/>
+                </a:solidFill>
+                <a:latin typeface="Calibri" pitchFamily="34" charset="0"/>
+                <a:ea typeface="Calibri" pitchFamily="34" charset="-122"/>
+                <a:cs typeface="Calibri" pitchFamily="34" charset="-120"/>
+              </a:rPr>
+              <a:t>DA COMPRENDERE OGGI</a:t>
+            </a:r>
+            <a:pPr indent="0" marL="0">
+              <a:buNone/>
+            </a:pPr>
+            <a:r>
+              <a:rPr lang="en-US" sz="1100" dirty="0">
+                <a:solidFill>
+                  <a:srgbClr val="075985"/>
+                </a:solidFill>
+                <a:latin typeface="Calibri" pitchFamily="34" charset="0"/>
+                <a:ea typeface="Calibri" pitchFamily="34" charset="-122"/>
+                <a:cs typeface="Calibri" pitchFamily="34" charset="-120"/>
+              </a:rPr>
+              <a:t> · tastiera e mouse</a:t>
+            </a:r>
+            <a:endParaRPr lang="en-US" sz="1100" dirty="0"/>
+          </a:p>
+        </p:txBody>
+      </p:sp>
+      <p:sp>
+        <p:nvSpPr>
           <p:cNvPr id="25" name="Slide Number Placeholder 0"/>
           <p:cNvSpPr>
             <a:spLocks noGrp="1"/>
@@ -6876,6 +7688,133 @@
       </p:sp>
       <p:sp>
         <p:nvSpPr>
+          <p:cNvPr id="13" name="Shape 11"/>
+          <p:cNvSpPr/>
+          <p:nvPr/>
+        </p:nvSpPr>
+        <p:spPr>
+          <a:xfrm>
+            <a:off x="8445576" y="91440"/>
+            <a:ext cx="3197479" cy="274320"/>
+          </a:xfrm>
+          <a:prstGeom prst="rect">
+            <a:avLst/>
+          </a:prstGeom>
+          <a:solidFill>
+            <a:srgbClr val="E0F2FE"/>
+          </a:solidFill>
+          <a:ln w="12700">
+            <a:solidFill>
+              <a:srgbClr val="0369A1"/>
+            </a:solidFill>
+            <a:prstDash val="solid"/>
+          </a:ln>
+        </p:spPr>
+      </p:sp>
+      <p:sp>
+        <p:nvSpPr>
+          <p:cNvPr id="14" name="Shape 12"/>
+          <p:cNvSpPr/>
+          <p:nvPr/>
+        </p:nvSpPr>
+        <p:spPr>
+          <a:xfrm>
+            <a:off x="8445576" y="91440"/>
+            <a:ext cx="73152" cy="274320"/>
+          </a:xfrm>
+          <a:prstGeom prst="rect">
+            <a:avLst/>
+          </a:prstGeom>
+          <a:solidFill>
+            <a:srgbClr val="0369A1"/>
+          </a:solidFill>
+          <a:ln w="12700">
+            <a:solidFill>
+              <a:srgbClr val="0369A1"/>
+            </a:solidFill>
+            <a:prstDash val="solid"/>
+          </a:ln>
+        </p:spPr>
+      </p:sp>
+      <p:pic>
+        <p:nvPicPr>
+          <p:cNvPr id="15" name="Image 0" descr="preencoded.png">    </p:cNvPr>
+          <p:cNvPicPr>
+            <a:picLocks noChangeAspect="1"/>
+          </p:cNvPicPr>
+          <p:nvPr/>
+        </p:nvPicPr>
+        <p:blipFill>
+          <a:blip r:embed="rId1"/>
+          <a:stretch>
+            <a:fillRect/>
+          </a:stretch>
+        </p:blipFill>
+        <p:spPr>
+          <a:xfrm>
+            <a:off x="8573592" y="128016"/>
+            <a:ext cx="201168" cy="201168"/>
+          </a:xfrm>
+          <a:prstGeom prst="rect">
+            <a:avLst/>
+          </a:prstGeom>
+        </p:spPr>
+      </p:pic>
+      <p:sp>
+        <p:nvSpPr>
+          <p:cNvPr id="16" name="Text 13"/>
+          <p:cNvSpPr txBox="1"/>
+          <p:nvPr/>
+        </p:nvSpPr>
+        <p:spPr>
+          <a:xfrm>
+            <a:off x="8829624" y="91440"/>
+            <a:ext cx="2776855" cy="274320"/>
+          </a:xfrm>
+          <a:prstGeom prst="rect">
+            <a:avLst/>
+          </a:prstGeom>
+          <a:noFill/>
+          <a:ln/>
+        </p:spPr>
+        <p:txBody>
+          <a:bodyPr wrap="square" lIns="0" tIns="0" rIns="0" bIns="0" rtlCol="0" anchor="ctr"/>
+          <a:lstStyle/>
+          <a:p>
+            <a:pPr indent="0" marL="0">
+              <a:buNone/>
+            </a:pPr>
+            <a:r>
+              <a:rPr lang="en-US" sz="1100" b="1" dirty="0">
+                <a:solidFill>
+                  <a:srgbClr val="075985"/>
+                </a:solidFill>
+                <a:latin typeface="Calibri" pitchFamily="34" charset="0"/>
+                <a:ea typeface="Calibri" pitchFamily="34" charset="-122"/>
+                <a:cs typeface="Calibri" pitchFamily="34" charset="-120"/>
+              </a:rPr>
+              <a:t>DA COMPRENDERE OGGI</a:t>
+            </a:r>
+            <a:pPr indent="0" marL="0">
+              <a:buNone/>
+            </a:pPr>
+            <a:r>
+              <a:rPr lang="en-US" sz="1100" dirty="0">
+                <a:solidFill>
+                  <a:srgbClr val="075985"/>
+                </a:solidFill>
+                <a:latin typeface="Calibri" pitchFamily="34" charset="0"/>
+                <a:ea typeface="Calibri" pitchFamily="34" charset="-122"/>
+                <a:cs typeface="Calibri" pitchFamily="34" charset="-120"/>
+              </a:rPr>
+              <a:t> · le stampanti</a:t>
+            </a:r>
+            <a:endParaRPr lang="en-US" sz="1100" dirty="0"/>
+          </a:p>
+        </p:txBody>
+      </p:sp>
+      <p:sp>
+        <p:nvSpPr>
           <p:cNvPr id="25" name="Slide Number Placeholder 0"/>
           <p:cNvSpPr>
             <a:spLocks noGrp="1"/>
@@ -7450,6 +8389,133 @@
               <a:t>Il laser scrive la pagina sul tamburo, riga per riga</a:t>
             </a:r>
             <a:endParaRPr lang="en-US" sz="1200" dirty="0"/>
+          </a:p>
+        </p:txBody>
+      </p:sp>
+      <p:sp>
+        <p:nvSpPr>
+          <p:cNvPr id="17" name="Shape 14"/>
+          <p:cNvSpPr/>
+          <p:nvPr/>
+        </p:nvSpPr>
+        <p:spPr>
+          <a:xfrm>
+            <a:off x="8445576" y="91440"/>
+            <a:ext cx="3197479" cy="274320"/>
+          </a:xfrm>
+          <a:prstGeom prst="rect">
+            <a:avLst/>
+          </a:prstGeom>
+          <a:solidFill>
+            <a:srgbClr val="E0F2FE"/>
+          </a:solidFill>
+          <a:ln w="12700">
+            <a:solidFill>
+              <a:srgbClr val="0369A1"/>
+            </a:solidFill>
+            <a:prstDash val="solid"/>
+          </a:ln>
+        </p:spPr>
+      </p:sp>
+      <p:sp>
+        <p:nvSpPr>
+          <p:cNvPr id="18" name="Shape 15"/>
+          <p:cNvSpPr/>
+          <p:nvPr/>
+        </p:nvSpPr>
+        <p:spPr>
+          <a:xfrm>
+            <a:off x="8445576" y="91440"/>
+            <a:ext cx="73152" cy="274320"/>
+          </a:xfrm>
+          <a:prstGeom prst="rect">
+            <a:avLst/>
+          </a:prstGeom>
+          <a:solidFill>
+            <a:srgbClr val="0369A1"/>
+          </a:solidFill>
+          <a:ln w="12700">
+            <a:solidFill>
+              <a:srgbClr val="0369A1"/>
+            </a:solidFill>
+            <a:prstDash val="solid"/>
+          </a:ln>
+        </p:spPr>
+      </p:sp>
+      <p:pic>
+        <p:nvPicPr>
+          <p:cNvPr id="19" name="Image 1" descr="preencoded.png">    </p:cNvPr>
+          <p:cNvPicPr>
+            <a:picLocks noChangeAspect="1"/>
+          </p:cNvPicPr>
+          <p:nvPr/>
+        </p:nvPicPr>
+        <p:blipFill>
+          <a:blip r:embed="rId2"/>
+          <a:stretch>
+            <a:fillRect/>
+          </a:stretch>
+        </p:blipFill>
+        <p:spPr>
+          <a:xfrm>
+            <a:off x="8573592" y="128016"/>
+            <a:ext cx="201168" cy="201168"/>
+          </a:xfrm>
+          <a:prstGeom prst="rect">
+            <a:avLst/>
+          </a:prstGeom>
+        </p:spPr>
+      </p:pic>
+      <p:sp>
+        <p:nvSpPr>
+          <p:cNvPr id="20" name="Text 16"/>
+          <p:cNvSpPr txBox="1"/>
+          <p:nvPr/>
+        </p:nvSpPr>
+        <p:spPr>
+          <a:xfrm>
+            <a:off x="8829624" y="91440"/>
+            <a:ext cx="2776855" cy="274320"/>
+          </a:xfrm>
+          <a:prstGeom prst="rect">
+            <a:avLst/>
+          </a:prstGeom>
+          <a:noFill/>
+          <a:ln/>
+        </p:spPr>
+        <p:txBody>
+          <a:bodyPr wrap="square" lIns="0" tIns="0" rIns="0" bIns="0" rtlCol="0" anchor="ctr"/>
+          <a:lstStyle/>
+          <a:p>
+            <a:pPr indent="0" marL="0">
+              <a:buNone/>
+            </a:pPr>
+            <a:r>
+              <a:rPr lang="en-US" sz="1100" b="1" dirty="0">
+                <a:solidFill>
+                  <a:srgbClr val="075985"/>
+                </a:solidFill>
+                <a:latin typeface="Calibri" pitchFamily="34" charset="0"/>
+                <a:ea typeface="Calibri" pitchFamily="34" charset="-122"/>
+                <a:cs typeface="Calibri" pitchFamily="34" charset="-120"/>
+              </a:rPr>
+              <a:t>DA COMPRENDERE OGGI</a:t>
+            </a:r>
+            <a:pPr indent="0" marL="0">
+              <a:buNone/>
+            </a:pPr>
+            <a:r>
+              <a:rPr lang="en-US" sz="1100" dirty="0">
+                <a:solidFill>
+                  <a:srgbClr val="075985"/>
+                </a:solidFill>
+                <a:latin typeface="Calibri" pitchFamily="34" charset="0"/>
+                <a:ea typeface="Calibri" pitchFamily="34" charset="-122"/>
+                <a:cs typeface="Calibri" pitchFamily="34" charset="-120"/>
+              </a:rPr>
+              <a:t> · le stampanti</a:t>
+            </a:r>
+            <a:endParaRPr lang="en-US" sz="1100" dirty="0"/>
           </a:p>
         </p:txBody>
       </p:sp>
@@ -9245,6 +10311,133 @@
       </p:graphicFrame>
       <p:sp>
         <p:nvSpPr>
+          <p:cNvPr id="4" name="Shape 1"/>
+          <p:cNvSpPr/>
+          <p:nvPr/>
+        </p:nvSpPr>
+        <p:spPr>
+          <a:xfrm>
+            <a:off x="7526350" y="91440"/>
+            <a:ext cx="4116705" cy="274320"/>
+          </a:xfrm>
+          <a:prstGeom prst="rect">
+            <a:avLst/>
+          </a:prstGeom>
+          <a:solidFill>
+            <a:srgbClr val="E0F2FE"/>
+          </a:solidFill>
+          <a:ln w="12700">
+            <a:solidFill>
+              <a:srgbClr val="0369A1"/>
+            </a:solidFill>
+            <a:prstDash val="solid"/>
+          </a:ln>
+        </p:spPr>
+      </p:sp>
+      <p:sp>
+        <p:nvSpPr>
+          <p:cNvPr id="5" name="Shape 2"/>
+          <p:cNvSpPr/>
+          <p:nvPr/>
+        </p:nvSpPr>
+        <p:spPr>
+          <a:xfrm>
+            <a:off x="7526350" y="91440"/>
+            <a:ext cx="73152" cy="274320"/>
+          </a:xfrm>
+          <a:prstGeom prst="rect">
+            <a:avLst/>
+          </a:prstGeom>
+          <a:solidFill>
+            <a:srgbClr val="0369A1"/>
+          </a:solidFill>
+          <a:ln w="12700">
+            <a:solidFill>
+              <a:srgbClr val="0369A1"/>
+            </a:solidFill>
+            <a:prstDash val="solid"/>
+          </a:ln>
+        </p:spPr>
+      </p:sp>
+      <p:pic>
+        <p:nvPicPr>
+          <p:cNvPr id="6" name="Image 0" descr="preencoded.png">    </p:cNvPr>
+          <p:cNvPicPr>
+            <a:picLocks noChangeAspect="1"/>
+          </p:cNvPicPr>
+          <p:nvPr/>
+        </p:nvPicPr>
+        <p:blipFill>
+          <a:blip r:embed="rId1"/>
+          <a:stretch>
+            <a:fillRect/>
+          </a:stretch>
+        </p:blipFill>
+        <p:spPr>
+          <a:xfrm>
+            <a:off x="7654366" y="128016"/>
+            <a:ext cx="201168" cy="201168"/>
+          </a:xfrm>
+          <a:prstGeom prst="rect">
+            <a:avLst/>
+          </a:prstGeom>
+        </p:spPr>
+      </p:pic>
+      <p:sp>
+        <p:nvSpPr>
+          <p:cNvPr id="7" name="Text 3"/>
+          <p:cNvSpPr txBox="1"/>
+          <p:nvPr/>
+        </p:nvSpPr>
+        <p:spPr>
+          <a:xfrm>
+            <a:off x="7910398" y="91440"/>
+            <a:ext cx="3696081" cy="274320"/>
+          </a:xfrm>
+          <a:prstGeom prst="rect">
+            <a:avLst/>
+          </a:prstGeom>
+          <a:noFill/>
+          <a:ln/>
+        </p:spPr>
+        <p:txBody>
+          <a:bodyPr wrap="square" lIns="0" tIns="0" rIns="0" bIns="0" rtlCol="0" anchor="ctr"/>
+          <a:lstStyle/>
+          <a:p>
+            <a:pPr indent="0" marL="0">
+              <a:buNone/>
+            </a:pPr>
+            <a:r>
+              <a:rPr lang="en-US" sz="1100" b="1" dirty="0">
+                <a:solidFill>
+                  <a:srgbClr val="075985"/>
+                </a:solidFill>
+                <a:latin typeface="Calibri" pitchFamily="34" charset="0"/>
+                <a:ea typeface="Calibri" pitchFamily="34" charset="-122"/>
+                <a:cs typeface="Calibri" pitchFamily="34" charset="-120"/>
+              </a:rPr>
+              <a:t>DA COMPRENDERE OGGI</a:t>
+            </a:r>
+            <a:pPr indent="0" marL="0">
+              <a:buNone/>
+            </a:pPr>
+            <a:r>
+              <a:rPr lang="en-US" sz="1100" dirty="0">
+                <a:solidFill>
+                  <a:srgbClr val="075985"/>
+                </a:solidFill>
+                <a:latin typeface="Calibri" pitchFamily="34" charset="0"/>
+                <a:ea typeface="Calibri" pitchFamily="34" charset="-122"/>
+                <a:cs typeface="Calibri" pitchFamily="34" charset="-120"/>
+              </a:rPr>
+              <a:t> · polling, interruzioni, DMA</a:t>
+            </a:r>
+            <a:endParaRPr lang="en-US" sz="1100" dirty="0"/>
+          </a:p>
+        </p:txBody>
+      </p:sp>
+      <p:sp>
+        <p:nvSpPr>
           <p:cNvPr id="25" name="Slide Number Placeholder 0"/>
           <p:cNvSpPr>
             <a:spLocks noGrp="1"/>
@@ -9810,6 +11003,133 @@
               <a:t>Il dispositivo scambia da solo interi blocchi di dati con la memoria; il processore si limita ad avviare il trasferimento e viene avvisato quando finisce.</a:t>
             </a:r>
             <a:endParaRPr lang="en-US" sz="2000" dirty="0"/>
+          </a:p>
+        </p:txBody>
+      </p:sp>
+      <p:sp>
+        <p:nvSpPr>
+          <p:cNvPr id="15" name="Shape 13"/>
+          <p:cNvSpPr/>
+          <p:nvPr/>
+        </p:nvSpPr>
+        <p:spPr>
+          <a:xfrm>
+            <a:off x="7526350" y="91440"/>
+            <a:ext cx="4116705" cy="274320"/>
+          </a:xfrm>
+          <a:prstGeom prst="rect">
+            <a:avLst/>
+          </a:prstGeom>
+          <a:solidFill>
+            <a:srgbClr val="E0F2FE"/>
+          </a:solidFill>
+          <a:ln w="12700">
+            <a:solidFill>
+              <a:srgbClr val="0369A1"/>
+            </a:solidFill>
+            <a:prstDash val="solid"/>
+          </a:ln>
+        </p:spPr>
+      </p:sp>
+      <p:sp>
+        <p:nvSpPr>
+          <p:cNvPr id="16" name="Shape 14"/>
+          <p:cNvSpPr/>
+          <p:nvPr/>
+        </p:nvSpPr>
+        <p:spPr>
+          <a:xfrm>
+            <a:off x="7526350" y="91440"/>
+            <a:ext cx="73152" cy="274320"/>
+          </a:xfrm>
+          <a:prstGeom prst="rect">
+            <a:avLst/>
+          </a:prstGeom>
+          <a:solidFill>
+            <a:srgbClr val="0369A1"/>
+          </a:solidFill>
+          <a:ln w="12700">
+            <a:solidFill>
+              <a:srgbClr val="0369A1"/>
+            </a:solidFill>
+            <a:prstDash val="solid"/>
+          </a:ln>
+        </p:spPr>
+      </p:sp>
+      <p:pic>
+        <p:nvPicPr>
+          <p:cNvPr id="17" name="Image 0" descr="preencoded.png">    </p:cNvPr>
+          <p:cNvPicPr>
+            <a:picLocks noChangeAspect="1"/>
+          </p:cNvPicPr>
+          <p:nvPr/>
+        </p:nvPicPr>
+        <p:blipFill>
+          <a:blip r:embed="rId1"/>
+          <a:stretch>
+            <a:fillRect/>
+          </a:stretch>
+        </p:blipFill>
+        <p:spPr>
+          <a:xfrm>
+            <a:off x="7654366" y="128016"/>
+            <a:ext cx="201168" cy="201168"/>
+          </a:xfrm>
+          <a:prstGeom prst="rect">
+            <a:avLst/>
+          </a:prstGeom>
+        </p:spPr>
+      </p:pic>
+      <p:sp>
+        <p:nvSpPr>
+          <p:cNvPr id="18" name="Text 15"/>
+          <p:cNvSpPr txBox="1"/>
+          <p:nvPr/>
+        </p:nvSpPr>
+        <p:spPr>
+          <a:xfrm>
+            <a:off x="7910398" y="91440"/>
+            <a:ext cx="3696081" cy="274320"/>
+          </a:xfrm>
+          <a:prstGeom prst="rect">
+            <a:avLst/>
+          </a:prstGeom>
+          <a:noFill/>
+          <a:ln/>
+        </p:spPr>
+        <p:txBody>
+          <a:bodyPr wrap="square" lIns="0" tIns="0" rIns="0" bIns="0" rtlCol="0" anchor="ctr"/>
+          <a:lstStyle/>
+          <a:p>
+            <a:pPr indent="0" marL="0">
+              <a:buNone/>
+            </a:pPr>
+            <a:r>
+              <a:rPr lang="en-US" sz="1100" b="1" dirty="0">
+                <a:solidFill>
+                  <a:srgbClr val="075985"/>
+                </a:solidFill>
+                <a:latin typeface="Calibri" pitchFamily="34" charset="0"/>
+                <a:ea typeface="Calibri" pitchFamily="34" charset="-122"/>
+                <a:cs typeface="Calibri" pitchFamily="34" charset="-120"/>
+              </a:rPr>
+              <a:t>DA COMPRENDERE OGGI</a:t>
+            </a:r>
+            <a:pPr indent="0" marL="0">
+              <a:buNone/>
+            </a:pPr>
+            <a:r>
+              <a:rPr lang="en-US" sz="1100" dirty="0">
+                <a:solidFill>
+                  <a:srgbClr val="075985"/>
+                </a:solidFill>
+                <a:latin typeface="Calibri" pitchFamily="34" charset="0"/>
+                <a:ea typeface="Calibri" pitchFamily="34" charset="-122"/>
+                <a:cs typeface="Calibri" pitchFamily="34" charset="-120"/>
+              </a:rPr>
+              <a:t> · polling, interruzioni, DMA</a:t>
+            </a:r>
+            <a:endParaRPr lang="en-US" sz="1100" dirty="0"/>
           </a:p>
         </p:txBody>
       </p:sp>
@@ -15632,6 +16952,133 @@
       </p:sp>
       <p:sp>
         <p:nvSpPr>
+          <p:cNvPr id="15" name="Shape 12"/>
+          <p:cNvSpPr/>
+          <p:nvPr/>
+        </p:nvSpPr>
+        <p:spPr>
+          <a:xfrm>
+            <a:off x="8117281" y="91440"/>
+            <a:ext cx="3525774" cy="274320"/>
+          </a:xfrm>
+          <a:prstGeom prst="rect">
+            <a:avLst/>
+          </a:prstGeom>
+          <a:solidFill>
+            <a:srgbClr val="E0F2FE"/>
+          </a:solidFill>
+          <a:ln w="12700">
+            <a:solidFill>
+              <a:srgbClr val="0369A1"/>
+            </a:solidFill>
+            <a:prstDash val="solid"/>
+          </a:ln>
+        </p:spPr>
+      </p:sp>
+      <p:sp>
+        <p:nvSpPr>
+          <p:cNvPr id="16" name="Shape 13"/>
+          <p:cNvSpPr/>
+          <p:nvPr/>
+        </p:nvSpPr>
+        <p:spPr>
+          <a:xfrm>
+            <a:off x="8117281" y="91440"/>
+            <a:ext cx="73152" cy="274320"/>
+          </a:xfrm>
+          <a:prstGeom prst="rect">
+            <a:avLst/>
+          </a:prstGeom>
+          <a:solidFill>
+            <a:srgbClr val="0369A1"/>
+          </a:solidFill>
+          <a:ln w="12700">
+            <a:solidFill>
+              <a:srgbClr val="0369A1"/>
+            </a:solidFill>
+            <a:prstDash val="solid"/>
+          </a:ln>
+        </p:spPr>
+      </p:sp>
+      <p:pic>
+        <p:nvPicPr>
+          <p:cNvPr id="17" name="Image 1" descr="preencoded.png">    </p:cNvPr>
+          <p:cNvPicPr>
+            <a:picLocks noChangeAspect="1"/>
+          </p:cNvPicPr>
+          <p:nvPr/>
+        </p:nvPicPr>
+        <p:blipFill>
+          <a:blip r:embed="rId2"/>
+          <a:stretch>
+            <a:fillRect/>
+          </a:stretch>
+        </p:blipFill>
+        <p:spPr>
+          <a:xfrm>
+            <a:off x="8245297" y="128016"/>
+            <a:ext cx="201168" cy="201168"/>
+          </a:xfrm>
+          <a:prstGeom prst="rect">
+            <a:avLst/>
+          </a:prstGeom>
+        </p:spPr>
+      </p:pic>
+      <p:sp>
+        <p:nvSpPr>
+          <p:cNvPr id="18" name="Text 14"/>
+          <p:cNvSpPr txBox="1"/>
+          <p:nvPr/>
+        </p:nvSpPr>
+        <p:spPr>
+          <a:xfrm>
+            <a:off x="8501329" y="91440"/>
+            <a:ext cx="3105150" cy="274320"/>
+          </a:xfrm>
+          <a:prstGeom prst="rect">
+            <a:avLst/>
+          </a:prstGeom>
+          <a:noFill/>
+          <a:ln/>
+        </p:spPr>
+        <p:txBody>
+          <a:bodyPr wrap="square" lIns="0" tIns="0" rIns="0" bIns="0" rtlCol="0" anchor="ctr"/>
+          <a:lstStyle/>
+          <a:p>
+            <a:pPr indent="0" marL="0">
+              <a:buNone/>
+            </a:pPr>
+            <a:r>
+              <a:rPr lang="en-US" sz="1100" b="1" dirty="0">
+                <a:solidFill>
+                  <a:srgbClr val="075985"/>
+                </a:solidFill>
+                <a:latin typeface="Calibri" pitchFamily="34" charset="0"/>
+                <a:ea typeface="Calibri" pitchFamily="34" charset="-122"/>
+                <a:cs typeface="Calibri" pitchFamily="34" charset="-120"/>
+              </a:rPr>
+              <a:t>DA COMPRENDERE OGGI</a:t>
+            </a:r>
+            <a:pPr indent="0" marL="0">
+              <a:buNone/>
+            </a:pPr>
+            <a:r>
+              <a:rPr lang="en-US" sz="1100" dirty="0">
+                <a:solidFill>
+                  <a:srgbClr val="075985"/>
+                </a:solidFill>
+                <a:latin typeface="Calibri" pitchFamily="34" charset="0"/>
+                <a:ea typeface="Calibri" pitchFamily="34" charset="-122"/>
+                <a:cs typeface="Calibri" pitchFamily="34" charset="-120"/>
+              </a:rPr>
+              <a:t> · display CRT e LCD</a:t>
+            </a:r>
+            <a:endParaRPr lang="en-US" sz="1100" dirty="0"/>
+          </a:p>
+        </p:txBody>
+      </p:sp>
+      <p:sp>
+        <p:nvSpPr>
           <p:cNvPr id="25" name="Slide Number Placeholder 0"/>
           <p:cNvSpPr>
             <a:spLocks noGrp="1"/>
@@ -17013,6 +18460,133 @@
       </p:graphicFrame>
       <p:sp>
         <p:nvSpPr>
+          <p:cNvPr id="4" name="Shape 1"/>
+          <p:cNvSpPr/>
+          <p:nvPr/>
+        </p:nvSpPr>
+        <p:spPr>
+          <a:xfrm>
+            <a:off x="8117281" y="91440"/>
+            <a:ext cx="3525774" cy="274320"/>
+          </a:xfrm>
+          <a:prstGeom prst="rect">
+            <a:avLst/>
+          </a:prstGeom>
+          <a:solidFill>
+            <a:srgbClr val="E0F2FE"/>
+          </a:solidFill>
+          <a:ln w="12700">
+            <a:solidFill>
+              <a:srgbClr val="0369A1"/>
+            </a:solidFill>
+            <a:prstDash val="solid"/>
+          </a:ln>
+        </p:spPr>
+      </p:sp>
+      <p:sp>
+        <p:nvSpPr>
+          <p:cNvPr id="5" name="Shape 2"/>
+          <p:cNvSpPr/>
+          <p:nvPr/>
+        </p:nvSpPr>
+        <p:spPr>
+          <a:xfrm>
+            <a:off x="8117281" y="91440"/>
+            <a:ext cx="73152" cy="274320"/>
+          </a:xfrm>
+          <a:prstGeom prst="rect">
+            <a:avLst/>
+          </a:prstGeom>
+          <a:solidFill>
+            <a:srgbClr val="0369A1"/>
+          </a:solidFill>
+          <a:ln w="12700">
+            <a:solidFill>
+              <a:srgbClr val="0369A1"/>
+            </a:solidFill>
+            <a:prstDash val="solid"/>
+          </a:ln>
+        </p:spPr>
+      </p:sp>
+      <p:pic>
+        <p:nvPicPr>
+          <p:cNvPr id="6" name="Image 0" descr="preencoded.png">    </p:cNvPr>
+          <p:cNvPicPr>
+            <a:picLocks noChangeAspect="1"/>
+          </p:cNvPicPr>
+          <p:nvPr/>
+        </p:nvPicPr>
+        <p:blipFill>
+          <a:blip r:embed="rId1"/>
+          <a:stretch>
+            <a:fillRect/>
+          </a:stretch>
+        </p:blipFill>
+        <p:spPr>
+          <a:xfrm>
+            <a:off x="8245297" y="128016"/>
+            <a:ext cx="201168" cy="201168"/>
+          </a:xfrm>
+          <a:prstGeom prst="rect">
+            <a:avLst/>
+          </a:prstGeom>
+        </p:spPr>
+      </p:pic>
+      <p:sp>
+        <p:nvSpPr>
+          <p:cNvPr id="7" name="Text 3"/>
+          <p:cNvSpPr txBox="1"/>
+          <p:nvPr/>
+        </p:nvSpPr>
+        <p:spPr>
+          <a:xfrm>
+            <a:off x="8501329" y="91440"/>
+            <a:ext cx="3105150" cy="274320"/>
+          </a:xfrm>
+          <a:prstGeom prst="rect">
+            <a:avLst/>
+          </a:prstGeom>
+          <a:noFill/>
+          <a:ln/>
+        </p:spPr>
+        <p:txBody>
+          <a:bodyPr wrap="square" lIns="0" tIns="0" rIns="0" bIns="0" rtlCol="0" anchor="ctr"/>
+          <a:lstStyle/>
+          <a:p>
+            <a:pPr indent="0" marL="0">
+              <a:buNone/>
+            </a:pPr>
+            <a:r>
+              <a:rPr lang="en-US" sz="1100" b="1" dirty="0">
+                <a:solidFill>
+                  <a:srgbClr val="075985"/>
+                </a:solidFill>
+                <a:latin typeface="Calibri" pitchFamily="34" charset="0"/>
+                <a:ea typeface="Calibri" pitchFamily="34" charset="-122"/>
+                <a:cs typeface="Calibri" pitchFamily="34" charset="-120"/>
+              </a:rPr>
+              <a:t>DA COMPRENDERE OGGI</a:t>
+            </a:r>
+            <a:pPr indent="0" marL="0">
+              <a:buNone/>
+            </a:pPr>
+            <a:r>
+              <a:rPr lang="en-US" sz="1100" dirty="0">
+                <a:solidFill>
+                  <a:srgbClr val="075985"/>
+                </a:solidFill>
+                <a:latin typeface="Calibri" pitchFamily="34" charset="0"/>
+                <a:ea typeface="Calibri" pitchFamily="34" charset="-122"/>
+                <a:cs typeface="Calibri" pitchFamily="34" charset="-120"/>
+              </a:rPr>
+              <a:t> · display CRT e LCD</a:t>
+            </a:r>
+            <a:endParaRPr lang="en-US" sz="1100" dirty="0"/>
+          </a:p>
+        </p:txBody>
+      </p:sp>
+      <p:sp>
+        <p:nvSpPr>
           <p:cNvPr id="25" name="Slide Number Placeholder 0"/>
           <p:cNvSpPr>
             <a:spLocks noGrp="1"/>
@@ -17612,6 +19186,133 @@
       </p:sp>
       <p:sp>
         <p:nvSpPr>
+          <p:cNvPr id="17" name="Shape 14"/>
+          <p:cNvSpPr/>
+          <p:nvPr/>
+        </p:nvSpPr>
+        <p:spPr>
+          <a:xfrm>
+            <a:off x="8117281" y="91440"/>
+            <a:ext cx="3525774" cy="274320"/>
+          </a:xfrm>
+          <a:prstGeom prst="rect">
+            <a:avLst/>
+          </a:prstGeom>
+          <a:solidFill>
+            <a:srgbClr val="E0F2FE"/>
+          </a:solidFill>
+          <a:ln w="12700">
+            <a:solidFill>
+              <a:srgbClr val="0369A1"/>
+            </a:solidFill>
+            <a:prstDash val="solid"/>
+          </a:ln>
+        </p:spPr>
+      </p:sp>
+      <p:sp>
+        <p:nvSpPr>
+          <p:cNvPr id="18" name="Shape 15"/>
+          <p:cNvSpPr/>
+          <p:nvPr/>
+        </p:nvSpPr>
+        <p:spPr>
+          <a:xfrm>
+            <a:off x="8117281" y="91440"/>
+            <a:ext cx="73152" cy="274320"/>
+          </a:xfrm>
+          <a:prstGeom prst="rect">
+            <a:avLst/>
+          </a:prstGeom>
+          <a:solidFill>
+            <a:srgbClr val="0369A1"/>
+          </a:solidFill>
+          <a:ln w="12700">
+            <a:solidFill>
+              <a:srgbClr val="0369A1"/>
+            </a:solidFill>
+            <a:prstDash val="solid"/>
+          </a:ln>
+        </p:spPr>
+      </p:sp>
+      <p:pic>
+        <p:nvPicPr>
+          <p:cNvPr id="19" name="Image 1" descr="preencoded.png">    </p:cNvPr>
+          <p:cNvPicPr>
+            <a:picLocks noChangeAspect="1"/>
+          </p:cNvPicPr>
+          <p:nvPr/>
+        </p:nvPicPr>
+        <p:blipFill>
+          <a:blip r:embed="rId2"/>
+          <a:stretch>
+            <a:fillRect/>
+          </a:stretch>
+        </p:blipFill>
+        <p:spPr>
+          <a:xfrm>
+            <a:off x="8245297" y="128016"/>
+            <a:ext cx="201168" cy="201168"/>
+          </a:xfrm>
+          <a:prstGeom prst="rect">
+            <a:avLst/>
+          </a:prstGeom>
+        </p:spPr>
+      </p:pic>
+      <p:sp>
+        <p:nvSpPr>
+          <p:cNvPr id="20" name="Text 16"/>
+          <p:cNvSpPr txBox="1"/>
+          <p:nvPr/>
+        </p:nvSpPr>
+        <p:spPr>
+          <a:xfrm>
+            <a:off x="8501329" y="91440"/>
+            <a:ext cx="3105150" cy="274320"/>
+          </a:xfrm>
+          <a:prstGeom prst="rect">
+            <a:avLst/>
+          </a:prstGeom>
+          <a:noFill/>
+          <a:ln/>
+        </p:spPr>
+        <p:txBody>
+          <a:bodyPr wrap="square" lIns="0" tIns="0" rIns="0" bIns="0" rtlCol="0" anchor="ctr"/>
+          <a:lstStyle/>
+          <a:p>
+            <a:pPr indent="0" marL="0">
+              <a:buNone/>
+            </a:pPr>
+            <a:r>
+              <a:rPr lang="en-US" sz="1100" b="1" dirty="0">
+                <a:solidFill>
+                  <a:srgbClr val="075985"/>
+                </a:solidFill>
+                <a:latin typeface="Calibri" pitchFamily="34" charset="0"/>
+                <a:ea typeface="Calibri" pitchFamily="34" charset="-122"/>
+                <a:cs typeface="Calibri" pitchFamily="34" charset="-120"/>
+              </a:rPr>
+              <a:t>DA COMPRENDERE OGGI</a:t>
+            </a:r>
+            <a:pPr indent="0" marL="0">
+              <a:buNone/>
+            </a:pPr>
+            <a:r>
+              <a:rPr lang="en-US" sz="1100" dirty="0">
+                <a:solidFill>
+                  <a:srgbClr val="075985"/>
+                </a:solidFill>
+                <a:latin typeface="Calibri" pitchFamily="34" charset="0"/>
+                <a:ea typeface="Calibri" pitchFamily="34" charset="-122"/>
+                <a:cs typeface="Calibri" pitchFamily="34" charset="-120"/>
+              </a:rPr>
+              <a:t> · display CRT e LCD</a:t>
+            </a:r>
+            <a:endParaRPr lang="en-US" sz="1100" dirty="0"/>
+          </a:p>
+        </p:txBody>
+      </p:sp>
+      <p:sp>
+        <p:nvSpPr>
           <p:cNvPr id="25" name="Slide Number Placeholder 0"/>
           <p:cNvSpPr>
             <a:spLocks noGrp="1"/>
@@ -18124,6 +19825,133 @@
       </p:sp>
       <p:sp>
         <p:nvSpPr>
+          <p:cNvPr id="15" name="Shape 12"/>
+          <p:cNvSpPr/>
+          <p:nvPr/>
+        </p:nvSpPr>
+        <p:spPr>
+          <a:xfrm>
+            <a:off x="8117281" y="91440"/>
+            <a:ext cx="3525774" cy="274320"/>
+          </a:xfrm>
+          <a:prstGeom prst="rect">
+            <a:avLst/>
+          </a:prstGeom>
+          <a:solidFill>
+            <a:srgbClr val="E0F2FE"/>
+          </a:solidFill>
+          <a:ln w="12700">
+            <a:solidFill>
+              <a:srgbClr val="0369A1"/>
+            </a:solidFill>
+            <a:prstDash val="solid"/>
+          </a:ln>
+        </p:spPr>
+      </p:sp>
+      <p:sp>
+        <p:nvSpPr>
+          <p:cNvPr id="16" name="Shape 13"/>
+          <p:cNvSpPr/>
+          <p:nvPr/>
+        </p:nvSpPr>
+        <p:spPr>
+          <a:xfrm>
+            <a:off x="8117281" y="91440"/>
+            <a:ext cx="73152" cy="274320"/>
+          </a:xfrm>
+          <a:prstGeom prst="rect">
+            <a:avLst/>
+          </a:prstGeom>
+          <a:solidFill>
+            <a:srgbClr val="0369A1"/>
+          </a:solidFill>
+          <a:ln w="12700">
+            <a:solidFill>
+              <a:srgbClr val="0369A1"/>
+            </a:solidFill>
+            <a:prstDash val="solid"/>
+          </a:ln>
+        </p:spPr>
+      </p:sp>
+      <p:pic>
+        <p:nvPicPr>
+          <p:cNvPr id="17" name="Image 1" descr="preencoded.png">    </p:cNvPr>
+          <p:cNvPicPr>
+            <a:picLocks noChangeAspect="1"/>
+          </p:cNvPicPr>
+          <p:nvPr/>
+        </p:nvPicPr>
+        <p:blipFill>
+          <a:blip r:embed="rId2"/>
+          <a:stretch>
+            <a:fillRect/>
+          </a:stretch>
+        </p:blipFill>
+        <p:spPr>
+          <a:xfrm>
+            <a:off x="8245297" y="128016"/>
+            <a:ext cx="201168" cy="201168"/>
+          </a:xfrm>
+          <a:prstGeom prst="rect">
+            <a:avLst/>
+          </a:prstGeom>
+        </p:spPr>
+      </p:pic>
+      <p:sp>
+        <p:nvSpPr>
+          <p:cNvPr id="18" name="Text 14"/>
+          <p:cNvSpPr txBox="1"/>
+          <p:nvPr/>
+        </p:nvSpPr>
+        <p:spPr>
+          <a:xfrm>
+            <a:off x="8501329" y="91440"/>
+            <a:ext cx="3105150" cy="274320"/>
+          </a:xfrm>
+          <a:prstGeom prst="rect">
+            <a:avLst/>
+          </a:prstGeom>
+          <a:noFill/>
+          <a:ln/>
+        </p:spPr>
+        <p:txBody>
+          <a:bodyPr wrap="square" lIns="0" tIns="0" rIns="0" bIns="0" rtlCol="0" anchor="ctr"/>
+          <a:lstStyle/>
+          <a:p>
+            <a:pPr indent="0" marL="0">
+              <a:buNone/>
+            </a:pPr>
+            <a:r>
+              <a:rPr lang="en-US" sz="1100" b="1" dirty="0">
+                <a:solidFill>
+                  <a:srgbClr val="075985"/>
+                </a:solidFill>
+                <a:latin typeface="Calibri" pitchFamily="34" charset="0"/>
+                <a:ea typeface="Calibri" pitchFamily="34" charset="-122"/>
+                <a:cs typeface="Calibri" pitchFamily="34" charset="-120"/>
+              </a:rPr>
+              <a:t>DA COMPRENDERE OGGI</a:t>
+            </a:r>
+            <a:pPr indent="0" marL="0">
+              <a:buNone/>
+            </a:pPr>
+            <a:r>
+              <a:rPr lang="en-US" sz="1100" dirty="0">
+                <a:solidFill>
+                  <a:srgbClr val="075985"/>
+                </a:solidFill>
+                <a:latin typeface="Calibri" pitchFamily="34" charset="0"/>
+                <a:ea typeface="Calibri" pitchFamily="34" charset="-122"/>
+                <a:cs typeface="Calibri" pitchFamily="34" charset="-120"/>
+              </a:rPr>
+              <a:t> · display CRT e LCD</a:t>
+            </a:r>
+            <a:endParaRPr lang="en-US" sz="1100" dirty="0"/>
+          </a:p>
+        </p:txBody>
+      </p:sp>
+      <p:sp>
+        <p:nvSpPr>
           <p:cNvPr id="25" name="Slide Number Placeholder 0"/>
           <p:cNvSpPr>
             <a:spLocks noGrp="1"/>
@@ -18676,6 +20504,133 @@
       </p:sp>
       <p:sp>
         <p:nvSpPr>
+          <p:cNvPr id="15" name="Shape 12"/>
+          <p:cNvSpPr/>
+          <p:nvPr/>
+        </p:nvSpPr>
+        <p:spPr>
+          <a:xfrm>
+            <a:off x="8117281" y="91440"/>
+            <a:ext cx="3525774" cy="274320"/>
+          </a:xfrm>
+          <a:prstGeom prst="rect">
+            <a:avLst/>
+          </a:prstGeom>
+          <a:solidFill>
+            <a:srgbClr val="E0F2FE"/>
+          </a:solidFill>
+          <a:ln w="12700">
+            <a:solidFill>
+              <a:srgbClr val="0369A1"/>
+            </a:solidFill>
+            <a:prstDash val="solid"/>
+          </a:ln>
+        </p:spPr>
+      </p:sp>
+      <p:sp>
+        <p:nvSpPr>
+          <p:cNvPr id="16" name="Shape 13"/>
+          <p:cNvSpPr/>
+          <p:nvPr/>
+        </p:nvSpPr>
+        <p:spPr>
+          <a:xfrm>
+            <a:off x="8117281" y="91440"/>
+            <a:ext cx="73152" cy="274320"/>
+          </a:xfrm>
+          <a:prstGeom prst="rect">
+            <a:avLst/>
+          </a:prstGeom>
+          <a:solidFill>
+            <a:srgbClr val="0369A1"/>
+          </a:solidFill>
+          <a:ln w="12700">
+            <a:solidFill>
+              <a:srgbClr val="0369A1"/>
+            </a:solidFill>
+            <a:prstDash val="solid"/>
+          </a:ln>
+        </p:spPr>
+      </p:sp>
+      <p:pic>
+        <p:nvPicPr>
+          <p:cNvPr id="17" name="Image 1" descr="preencoded.png">    </p:cNvPr>
+          <p:cNvPicPr>
+            <a:picLocks noChangeAspect="1"/>
+          </p:cNvPicPr>
+          <p:nvPr/>
+        </p:nvPicPr>
+        <p:blipFill>
+          <a:blip r:embed="rId2"/>
+          <a:stretch>
+            <a:fillRect/>
+          </a:stretch>
+        </p:blipFill>
+        <p:spPr>
+          <a:xfrm>
+            <a:off x="8245297" y="128016"/>
+            <a:ext cx="201168" cy="201168"/>
+          </a:xfrm>
+          <a:prstGeom prst="rect">
+            <a:avLst/>
+          </a:prstGeom>
+        </p:spPr>
+      </p:pic>
+      <p:sp>
+        <p:nvSpPr>
+          <p:cNvPr id="18" name="Text 14"/>
+          <p:cNvSpPr txBox="1"/>
+          <p:nvPr/>
+        </p:nvSpPr>
+        <p:spPr>
+          <a:xfrm>
+            <a:off x="8501329" y="91440"/>
+            <a:ext cx="3105150" cy="274320"/>
+          </a:xfrm>
+          <a:prstGeom prst="rect">
+            <a:avLst/>
+          </a:prstGeom>
+          <a:noFill/>
+          <a:ln/>
+        </p:spPr>
+        <p:txBody>
+          <a:bodyPr wrap="square" lIns="0" tIns="0" rIns="0" bIns="0" rtlCol="0" anchor="ctr"/>
+          <a:lstStyle/>
+          <a:p>
+            <a:pPr indent="0" marL="0">
+              <a:buNone/>
+            </a:pPr>
+            <a:r>
+              <a:rPr lang="en-US" sz="1100" b="1" dirty="0">
+                <a:solidFill>
+                  <a:srgbClr val="075985"/>
+                </a:solidFill>
+                <a:latin typeface="Calibri" pitchFamily="34" charset="0"/>
+                <a:ea typeface="Calibri" pitchFamily="34" charset="-122"/>
+                <a:cs typeface="Calibri" pitchFamily="34" charset="-120"/>
+              </a:rPr>
+              <a:t>DA COMPRENDERE OGGI</a:t>
+            </a:r>
+            <a:pPr indent="0" marL="0">
+              <a:buNone/>
+            </a:pPr>
+            <a:r>
+              <a:rPr lang="en-US" sz="1100" dirty="0">
+                <a:solidFill>
+                  <a:srgbClr val="075985"/>
+                </a:solidFill>
+                <a:latin typeface="Calibri" pitchFamily="34" charset="0"/>
+                <a:ea typeface="Calibri" pitchFamily="34" charset="-122"/>
+                <a:cs typeface="Calibri" pitchFamily="34" charset="-120"/>
+              </a:rPr>
+              <a:t> · display CRT e LCD</a:t>
+            </a:r>
+            <a:endParaRPr lang="en-US" sz="1100" dirty="0"/>
+          </a:p>
+        </p:txBody>
+      </p:sp>
+      <p:sp>
+        <p:nvSpPr>
           <p:cNvPr id="25" name="Slide Number Placeholder 0"/>
           <p:cNvSpPr>
             <a:spLocks noGrp="1"/>
@@ -19192,6 +21147,133 @@
       </p:sp>
       <p:sp>
         <p:nvSpPr>
+          <p:cNvPr id="9" name="Shape 7"/>
+          <p:cNvSpPr/>
+          <p:nvPr/>
+        </p:nvSpPr>
+        <p:spPr>
+          <a:xfrm>
+            <a:off x="8117281" y="91440"/>
+            <a:ext cx="3525774" cy="274320"/>
+          </a:xfrm>
+          <a:prstGeom prst="rect">
+            <a:avLst/>
+          </a:prstGeom>
+          <a:solidFill>
+            <a:srgbClr val="E0F2FE"/>
+          </a:solidFill>
+          <a:ln w="12700">
+            <a:solidFill>
+              <a:srgbClr val="0369A1"/>
+            </a:solidFill>
+            <a:prstDash val="solid"/>
+          </a:ln>
+        </p:spPr>
+      </p:sp>
+      <p:sp>
+        <p:nvSpPr>
+          <p:cNvPr id="10" name="Shape 8"/>
+          <p:cNvSpPr/>
+          <p:nvPr/>
+        </p:nvSpPr>
+        <p:spPr>
+          <a:xfrm>
+            <a:off x="8117281" y="91440"/>
+            <a:ext cx="73152" cy="274320"/>
+          </a:xfrm>
+          <a:prstGeom prst="rect">
+            <a:avLst/>
+          </a:prstGeom>
+          <a:solidFill>
+            <a:srgbClr val="0369A1"/>
+          </a:solidFill>
+          <a:ln w="12700">
+            <a:solidFill>
+              <a:srgbClr val="0369A1"/>
+            </a:solidFill>
+            <a:prstDash val="solid"/>
+          </a:ln>
+        </p:spPr>
+      </p:sp>
+      <p:pic>
+        <p:nvPicPr>
+          <p:cNvPr id="11" name="Image 0" descr="preencoded.png">    </p:cNvPr>
+          <p:cNvPicPr>
+            <a:picLocks noChangeAspect="1"/>
+          </p:cNvPicPr>
+          <p:nvPr/>
+        </p:nvPicPr>
+        <p:blipFill>
+          <a:blip r:embed="rId1"/>
+          <a:stretch>
+            <a:fillRect/>
+          </a:stretch>
+        </p:blipFill>
+        <p:spPr>
+          <a:xfrm>
+            <a:off x="8245297" y="128016"/>
+            <a:ext cx="201168" cy="201168"/>
+          </a:xfrm>
+          <a:prstGeom prst="rect">
+            <a:avLst/>
+          </a:prstGeom>
+        </p:spPr>
+      </p:pic>
+      <p:sp>
+        <p:nvSpPr>
+          <p:cNvPr id="12" name="Text 9"/>
+          <p:cNvSpPr txBox="1"/>
+          <p:nvPr/>
+        </p:nvSpPr>
+        <p:spPr>
+          <a:xfrm>
+            <a:off x="8501329" y="91440"/>
+            <a:ext cx="3105150" cy="274320"/>
+          </a:xfrm>
+          <a:prstGeom prst="rect">
+            <a:avLst/>
+          </a:prstGeom>
+          <a:noFill/>
+          <a:ln/>
+        </p:spPr>
+        <p:txBody>
+          <a:bodyPr wrap="square" lIns="0" tIns="0" rIns="0" bIns="0" rtlCol="0" anchor="ctr"/>
+          <a:lstStyle/>
+          <a:p>
+            <a:pPr indent="0" marL="0">
+              <a:buNone/>
+            </a:pPr>
+            <a:r>
+              <a:rPr lang="en-US" sz="1100" b="1" dirty="0">
+                <a:solidFill>
+                  <a:srgbClr val="075985"/>
+                </a:solidFill>
+                <a:latin typeface="Calibri" pitchFamily="34" charset="0"/>
+                <a:ea typeface="Calibri" pitchFamily="34" charset="-122"/>
+                <a:cs typeface="Calibri" pitchFamily="34" charset="-120"/>
+              </a:rPr>
+              <a:t>DA COMPRENDERE OGGI</a:t>
+            </a:r>
+            <a:pPr indent="0" marL="0">
+              <a:buNone/>
+            </a:pPr>
+            <a:r>
+              <a:rPr lang="en-US" sz="1100" dirty="0">
+                <a:solidFill>
+                  <a:srgbClr val="075985"/>
+                </a:solidFill>
+                <a:latin typeface="Calibri" pitchFamily="34" charset="0"/>
+                <a:ea typeface="Calibri" pitchFamily="34" charset="-122"/>
+                <a:cs typeface="Calibri" pitchFamily="34" charset="-120"/>
+              </a:rPr>
+              <a:t> · display CRT e LCD</a:t>
+            </a:r>
+            <a:endParaRPr lang="en-US" sz="1100" dirty="0"/>
+          </a:p>
+        </p:txBody>
+      </p:sp>
+      <p:sp>
+        <p:nvSpPr>
           <p:cNvPr id="25" name="Slide Number Placeholder 0"/>
           <p:cNvSpPr>
             <a:spLocks noGrp="1"/>
@@ -19696,6 +21778,133 @@
               <a:t>Le tastiere di oggi si collegano via USB, o senza fili</a:t>
             </a:r>
             <a:endParaRPr lang="en-US" sz="2200" dirty="0"/>
+          </a:p>
+        </p:txBody>
+      </p:sp>
+      <p:sp>
+        <p:nvSpPr>
+          <p:cNvPr id="13" name="Shape 11"/>
+          <p:cNvSpPr/>
+          <p:nvPr/>
+        </p:nvSpPr>
+        <p:spPr>
+          <a:xfrm>
+            <a:off x="8182940" y="91440"/>
+            <a:ext cx="3460115" cy="274320"/>
+          </a:xfrm>
+          <a:prstGeom prst="rect">
+            <a:avLst/>
+          </a:prstGeom>
+          <a:solidFill>
+            <a:srgbClr val="E0F2FE"/>
+          </a:solidFill>
+          <a:ln w="12700">
+            <a:solidFill>
+              <a:srgbClr val="0369A1"/>
+            </a:solidFill>
+            <a:prstDash val="solid"/>
+          </a:ln>
+        </p:spPr>
+      </p:sp>
+      <p:sp>
+        <p:nvSpPr>
+          <p:cNvPr id="14" name="Shape 12"/>
+          <p:cNvSpPr/>
+          <p:nvPr/>
+        </p:nvSpPr>
+        <p:spPr>
+          <a:xfrm>
+            <a:off x="8182940" y="91440"/>
+            <a:ext cx="73152" cy="274320"/>
+          </a:xfrm>
+          <a:prstGeom prst="rect">
+            <a:avLst/>
+          </a:prstGeom>
+          <a:solidFill>
+            <a:srgbClr val="0369A1"/>
+          </a:solidFill>
+          <a:ln w="12700">
+            <a:solidFill>
+              <a:srgbClr val="0369A1"/>
+            </a:solidFill>
+            <a:prstDash val="solid"/>
+          </a:ln>
+        </p:spPr>
+      </p:sp>
+      <p:pic>
+        <p:nvPicPr>
+          <p:cNvPr id="15" name="Image 0" descr="preencoded.png">    </p:cNvPr>
+          <p:cNvPicPr>
+            <a:picLocks noChangeAspect="1"/>
+          </p:cNvPicPr>
+          <p:nvPr/>
+        </p:nvPicPr>
+        <p:blipFill>
+          <a:blip r:embed="rId1"/>
+          <a:stretch>
+            <a:fillRect/>
+          </a:stretch>
+        </p:blipFill>
+        <p:spPr>
+          <a:xfrm>
+            <a:off x="8310956" y="128016"/>
+            <a:ext cx="201168" cy="201168"/>
+          </a:xfrm>
+          <a:prstGeom prst="rect">
+            <a:avLst/>
+          </a:prstGeom>
+        </p:spPr>
+      </p:pic>
+      <p:sp>
+        <p:nvSpPr>
+          <p:cNvPr id="16" name="Text 13"/>
+          <p:cNvSpPr txBox="1"/>
+          <p:nvPr/>
+        </p:nvSpPr>
+        <p:spPr>
+          <a:xfrm>
+            <a:off x="8566988" y="91440"/>
+            <a:ext cx="3039491" cy="274320"/>
+          </a:xfrm>
+          <a:prstGeom prst="rect">
+            <a:avLst/>
+          </a:prstGeom>
+          <a:noFill/>
+          <a:ln/>
+        </p:spPr>
+        <p:txBody>
+          <a:bodyPr wrap="square" lIns="0" tIns="0" rIns="0" bIns="0" rtlCol="0" anchor="ctr"/>
+          <a:lstStyle/>
+          <a:p>
+            <a:pPr indent="0" marL="0">
+              <a:buNone/>
+            </a:pPr>
+            <a:r>
+              <a:rPr lang="en-US" sz="1100" b="1" dirty="0">
+                <a:solidFill>
+                  <a:srgbClr val="075985"/>
+                </a:solidFill>
+                <a:latin typeface="Calibri" pitchFamily="34" charset="0"/>
+                <a:ea typeface="Calibri" pitchFamily="34" charset="-122"/>
+                <a:cs typeface="Calibri" pitchFamily="34" charset="-120"/>
+              </a:rPr>
+              <a:t>DA COMPRENDERE OGGI</a:t>
+            </a:r>
+            <a:pPr indent="0" marL="0">
+              <a:buNone/>
+            </a:pPr>
+            <a:r>
+              <a:rPr lang="en-US" sz="1100" dirty="0">
+                <a:solidFill>
+                  <a:srgbClr val="075985"/>
+                </a:solidFill>
+                <a:latin typeface="Calibri" pitchFamily="34" charset="0"/>
+                <a:ea typeface="Calibri" pitchFamily="34" charset="-122"/>
+                <a:cs typeface="Calibri" pitchFamily="34" charset="-120"/>
+              </a:rPr>
+              <a:t> · tastiera e mouse</a:t>
+            </a:r>
+            <a:endParaRPr lang="en-US" sz="1100" dirty="0"/>
           </a:p>
         </p:txBody>
       </p:sp>

--- a/it/slides/21-Architettura_dei_Calcolatori-Ingresso_Uscita.pptx
+++ b/it/slides/21-Architettura_dei_Calcolatori-Ingresso_Uscita.pptx
@@ -126,13 +126,13 @@
   <p:extLst>
     <p:ext uri="{521415D9-36F7-43E2-AB2F-B90AF26B5E84}">
       <p14:sectionLst xmlns:p14="http://schemas.microsoft.com/office/powerpoint/2010/main">
-        <p14:section name="Apertura" id="{858bd1af-b5ec-a075-855a-6e99770db307}">
+        <p14:section name="Apertura" id="{8b440b69-6cc7-609e-2606-4f7594f413aa}">
           <p14:sldIdLst>
             <p14:sldId id="256"/>
             <p14:sldId id="257"/>
           </p14:sldIdLst>
         </p14:section>
-        <p14:section name="I display" id="{c1baa7c6-a4e8-f6bc-1758-af75d455d63e}">
+        <p14:section name="I display" id="{682b2e0c-3bcc-f716-92fd-fb9d4f198f0c}">
           <p14:sldIdLst>
             <p14:sldId id="258"/>
             <p14:sldId id="259"/>
@@ -142,7 +142,7 @@
             <p14:sldId id="263"/>
           </p14:sldIdLst>
         </p14:section>
-        <p14:section name="Tastiera e mouse" id="{0af0686a-20eb-48cc-2065-9dd3bf37fe64}">
+        <p14:section name="Tastiera e mouse" id="{38dee0d1-7bc2-8746-c19c-76506dd1db51}">
           <p14:sldIdLst>
             <p14:sldId id="264"/>
             <p14:sldId id="265"/>
@@ -150,13 +150,13 @@
             <p14:sldId id="267"/>
           </p14:sldIdLst>
         </p14:section>
-        <p14:section name="Le stampanti" id="{bca4ce65-7242-6881-c277-08d8a9c68978}">
+        <p14:section name="Le stampanti" id="{0a2ffe0a-9086-e84e-67b1-81e9cea7f584}">
           <p14:sldIdLst>
             <p14:sldId id="268"/>
             <p14:sldId id="269"/>
           </p14:sldIdLst>
         </p14:section>
-        <p14:section name="Ritorno alla macchina" id="{d5f6b8ca-16b8-1603-8283-8e440331a3a7}">
+        <p14:section name="Ritorno alla macchina" id="{67f04581-8800-591f-70b4-8e3fd9511b9c}">
           <p14:sldIdLst>
             <p14:sldId id="270"/>
             <p14:sldId id="271"/>

--- a/it/slides/21-Architettura_dei_Calcolatori-Ingresso_Uscita.pptx
+++ b/it/slides/21-Architettura_dei_Calcolatori-Ingresso_Uscita.pptx
@@ -126,13 +126,13 @@
   <p:extLst>
     <p:ext uri="{521415D9-36F7-43E2-AB2F-B90AF26B5E84}">
       <p14:sectionLst xmlns:p14="http://schemas.microsoft.com/office/powerpoint/2010/main">
-        <p14:section name="Apertura" id="{8b440b69-6cc7-609e-2606-4f7594f413aa}">
+        <p14:section name="Apertura" id="{b2e05e80-1856-6bd0-f7d5-0756c3989cd6}">
           <p14:sldIdLst>
             <p14:sldId id="256"/>
             <p14:sldId id="257"/>
           </p14:sldIdLst>
         </p14:section>
-        <p14:section name="I display" id="{682b2e0c-3bcc-f716-92fd-fb9d4f198f0c}">
+        <p14:section name="I display" id="{2384213b-fb53-07e3-05f5-ff33220bef98}">
           <p14:sldIdLst>
             <p14:sldId id="258"/>
             <p14:sldId id="259"/>
@@ -142,7 +142,7 @@
             <p14:sldId id="263"/>
           </p14:sldIdLst>
         </p14:section>
-        <p14:section name="Tastiera e mouse" id="{38dee0d1-7bc2-8746-c19c-76506dd1db51}">
+        <p14:section name="Tastiera e mouse" id="{6df7c731-bcff-e8b9-67a0-dc1462c7c451}">
           <p14:sldIdLst>
             <p14:sldId id="264"/>
             <p14:sldId id="265"/>
@@ -150,13 +150,13 @@
             <p14:sldId id="267"/>
           </p14:sldIdLst>
         </p14:section>
-        <p14:section name="Le stampanti" id="{0a2ffe0a-9086-e84e-67b1-81e9cea7f584}">
+        <p14:section name="Le stampanti" id="{1e0626fa-61c9-ad65-56fc-90a6a4fef1fb}">
           <p14:sldIdLst>
             <p14:sldId id="268"/>
             <p14:sldId id="269"/>
           </p14:sldIdLst>
         </p14:section>
-        <p14:section name="Ritorno alla macchina" id="{67f04581-8800-591f-70b4-8e3fd9511b9c}">
+        <p14:section name="Ritorno alla macchina" id="{f58da49e-2e95-7609-b91b-9311a035de39}">
           <p14:sldIdLst>
             <p14:sldId id="270"/>
             <p14:sldId id="271"/>
@@ -570,7 +570,7 @@
           <a:p>
             <a:r>
               <a:rPr lang="en-US" dirty="0"/>
-              <a:t>Questa lezione riguarda il confine tra la macchina e il mondo: i dispositivi attraverso cui l'informazione entra ed esce. Vedrete come si forma un'immagine su uno schermo, che cosa succede tra un tasto e il processore, che cosa dice un mouse, come funziona una stampante laser. Il filo che li lega è che ciascuno di questi dispositivi, dentro, è fatto di macchine che avete già progettato. E la lezione comincia e finisce sul kit, con il dispositivo che usate dal primo laboratorio: un pulsante.
+              <a:t>Questa lezione riguarda il confine tra la macchina e il mondo: i dispositivi attraverso cui l'informazione entra ed esce. Mostra come si forma un'immagine su uno schermo, che cosa accade tra un tasto e il processore, che cosa comunica un mouse, e come funziona una stampante laser. Il filo conduttore è che ciascuno di questi dispositivi è internamente composto da macchine già progettate in questo corso, encoder, contatori, registri a scorrimento e controllori. La lezione comincia e finisce sul kit, con il dispositivo usato dalla prima sessione di laboratorio: un pulsante.
 Stato di apprendimento: DA COMPRENDERE OGGI, alla fine di questa lezione lo spiegate, lo seguite passo passo e lo applicate da soli; DA UTILIZZARE OGGI, oggi seguite e usate la ricetta; come funziona dentro si spiega più avanti, o non fa parte del corso; DA COMPRENDERE PIÙ AVANTI, riconoscete il nome e lo scopo; lo spiega una lezione successiva. Una slide senza etichetta è contesto: una storia, un esempio, una domanda, un esercizio.
 Stato di apprendimento di questa lezione. DA COMPRENDERE OGGI: polling, interruzioni, DMA; display CRT e LCD; tastiera e mouse; le stampanti. DA UTILIZZARE OGGI: il programma completo, gli strumenti di PRG32 (si usa, non si studia, in questo corso). DA COMPRENDERE PIÙ AVANTI: niente. Una slide senza etichetta è contesto: una storia, un esempio, una domanda, un esercizio.
 Per il docente: Spirale: gli studenti leggono il joystick fin dai primi laboratori; la lezione si apre chiedendo che cosa c'è dietro prg32_input_read, poi tratta i dispositivi classici e i tre modi in cui un processore può gestirli.</a:t>
@@ -661,7 +661,7 @@
           <a:p>
             <a:r>
               <a:rPr lang="en-US" dirty="0"/>
-              <a:t>Il percorso della pressione di un tasto, da sinistra a destra. I tasti sono interruttori disposti in righe e colonne: premere D chiude un incrocio. Un codificatore trasforma la combinazione di riga e colonna in un codice di n bit. Un registro a scorrimento trasforma quegli n bit in parallelo in n bit in serie. Un'interfaccia seriale, per esempio un controller USB, consegna il codice al bus di sistema e alza un'interruzione. Il codificatore è quello della Lezione 11, il registro a scorrimento quello della Lezione 14: avete progettato ogni blocco di questa slide.
+              <a:t>Il percorso della pressione di un tasto, da sinistra a destra. I tasti sono interruttori disposti in righe e colonne, così che premere D chiuda un incrocio. Un encoder converte la combinazione di riga e colonna in un codice di n bit. Un registro a scorrimento converte quegli n bit paralleli in n bit seriali. Un'interfaccia seriale, per esempio un controllore USB, consegna il codice al bus di sistema e solleva un'interruzione. L'encoder è quello della Lezione 11 e il registro a scorrimento quello della Lezione 14: ogni blocco di questa slide è già stato progettato nel corso.
 DA COMPRENDERE OGGI: tastiera e mouse.
 Per il docente: Ogni blocco di questa slide è una macchina che gli studenti hanno già progettato: è il frutto delle Lezioni dalla 11 alla 14.</a:t>
             </a:r>
@@ -751,7 +751,7 @@
           <a:p>
             <a:r>
               <a:rPr lang="en-US" dirty="0"/>
-              <a:t>Il mouse è stato inventato negli anni Sessanta da Douglas Engelbart: una scatola di legno con due ruote sotto e un filo che esce da dietro, come una coda. Le due ruote misuravano il movimento lungo i due assi. Nel mouse meccanico una pallina fa girare due rulli, ciascuno collegato a un contatore. Nel mouse ottico una luce e una minuscola telecamera osservano la superficie sottostante e misurano come si muove. In tutti e tre, il movimento diventa due numeri.
+              <a:t>Il mouse fu inventato negli anni Sessanta da Douglas Engelbart: una scatola di legno con due rotelle sotto e un cavo che usciva dal retro, come una coda. Le due rotelle misuravano il movimento lungo i due assi. Nel mouse meccanico una sfera fa girare due rulli, ciascuno collegato a un contatore. Nel mouse ottico una sorgente di luce e una minuscola telecamera osservano la superficie sottostante e ne misurano lo spostamento. In ogni caso il movimento viene convertito in due numeri.
 DA COMPRENDERE OGGI: tastiera e mouse.
 Per il docente: La presentazione originale data il mouse al 1967, l'anno di deposito del brevetto; il primo prototipo è del 1964 e la celebre dimostrazione pubblica del 1968. Contatori: le macchine sequenziali della Lezione 13.</a:t>
             </a:r>
@@ -841,7 +841,7 @@
           <a:p>
             <a:r>
               <a:rPr lang="en-US" dirty="0"/>
-              <a:t>Che cosa invia un mouse. Ogni volta che si sposta di una distanza minima, circa un centesimo di pollice, invia tre byte: lo spostamento lungo x dall'ultimo rapporto, lo spostamento lungo y, e lo stato dei pulsanti. Notate che invia spostamenti, non posizioni: è il programma a tenere la posizione del puntatore, sommando. Dentro, come a destra: due contatori, un registro a scorrimento, un'interfaccia seriale. Il software che parla con il dispositivo è il suo driver di periferica.
+              <a:t>Che cosa trasmette un mouse. Ogni volta che si sposta di una distanza minima, circa un centesimo di pollice, invia tre byte: lo spostamento lungo x dall'ultimo rapporto, lo spostamento lungo y, e lo stato dei pulsanti. Invia spostamenti, non posizioni: è il programma a mantenere la posizione del puntatore accumulandoli. Internamente, come mostrato a destra, ci sono due contatori, un registro a scorrimento e un'interfaccia seriale. Il software che comunica con il dispositivo è il suo driver.
 DA COMPRENDERE OGGI: tastiera e mouse.
 Per il docente: La presentazione originale dice che il primo byte riporta lo spostamento «negli ultimi 100 millisecondi»; i mouse moderni riferiscono fino a mille volte al secondo. I byte di spostamento con segno sono numeri in complemento a due (Lezione 05).</a:t>
             </a:r>
@@ -931,7 +931,7 @@
           <a:p>
             <a:r>
               <a:rPr lang="en-US" dirty="0"/>
-              <a:t>Una stampante si descrive con la sua velocità, in righe o pagine al minuto, e con la sua risoluzione, in punti per pollice. Le tecnologie, in ordine storico: le stampanti a margherita e a catena, che battevano caratteri interi e sono in disuso; ad aghi, in cui degli aghi colpiscono un nastro inchiostrato; a getto d'inchiostro, con minuscole gocce; laser. Una stampante è anche un piccolo calcolatore, con processore, memoria e firmware propri.
+              <a:t>Una stampante è caratterizzata dalla sua velocità, in righe o pagine al minuto, e dalla sua risoluzione, in punti per pollice. Le tecnologie, in ordine storico: le stampanti a margherita e a catena, che battevano caratteri interi e sono ormai in disuso; le stampanti ad aghi, in cui degli aghi colpiscono un nastro inchiostrato; le stampanti a getto d'inchiostro, che proiettano goccioline minuscole; e le stampanti laser. Una stampante è essa stessa un piccolo calcolatore, con un proprio processore, una propria memoria e un proprio firmware.
 DA COMPRENDERE OGGI: le stampanti.
 Per il docente: In inglese: daisy wheel, chain, dot matrix, ink jet, laser.</a:t>
             </a:r>
@@ -1021,7 +1021,7 @@
           <a:p>
             <a:r>
               <a:rPr lang="en-US" dirty="0"/>
-              <a:t>La stampante laser deriva dalla fotocopiatrice. Un tamburo viene caricato a circa mille volt. Un raggio laser, riflesso da uno specchio rotante, scandisce il tamburo per la sua lunghezza, acceso e spento per disegnare una riga di punti; i punti che colpisce perdono la carica. Il toner è attratto dai punti ancora carichi. Il tamburo viene premuto contro la carta e vi trasferisce il toner, che dei rulli riscaldati fissano. Seguite nella figura il percorso della carta. La pagina esiste prima come bitmap nella memoria della stampante.
+              <a:t>La stampante laser deriva dalla fotocopiatrice. Un tamburo viene caricato a circa mille volt. Un fascio laser, deviato da uno specchio rotante, percorre il tamburo per la sua lunghezza, acceso e spento per disegnare una riga di punti, e i punti che colpisce perdono la loro carica. Il toner viene attratto dai punti rimasti carichi. Il tamburo viene premuto contro la carta e vi trasferisce il toner, che rulli riscaldati poi fissano. La pagina esiste prima come bitmap nella memoria della stampante, quindi la stampa è, in fondo, un altro frame buffer letto riga per riga.
 DA COMPRENDERE OGGI: le stampanti.
 Per il docente: Tre slide dell'originale sono fuse in una. La pagina viene prima costruita come bitmap nella memoria della stampante: un frame buffer per la carta.
 Immagini: Laser printer-Writing.svg, DMahalko, traced by Stannered, CC BY 3.0, Wikimedia Commons.</a:t>
@@ -1112,7 +1112,7 @@
           <a:p>
             <a:r>
               <a:rPr lang="en-US" dirty="0"/>
-              <a:t>I dispositivi del kit in una tabella: per ciascuno, la direzione, il collegamento e le funzioni con cui una cartuccia lo usa. Il joystick e i pulsanti sono ingressi, un interruttore per piedino. Il display è un'uscita su un bus SPI. L'amplificatore con il suo altoparlante è un'uscita su un bus I2S. La radio Wi-Fi e la porta USB lavorano in entrambe le direzioni. Notate che non avete mai toccato direttamente nessuno di questi collegamenti: lo fa il runtime, e vi offre delle funzioni.
+              <a:t>I dispositivi del kit in una tabella: per ciascuno, la direzione, il collegamento e le funzioni con cui una cartuccia lo usa. Joystick e pulsanti sono ingressi, un interruttore per piedino. Il display è un'uscita su un bus SPI. L'amplificatore con il suo altoparlante è un'uscita su un bus I2S. La radio Wi-Fi e la porta USB operano in entrambe le direzioni. Nessuna di queste connessioni è mai stata toccata direttamente da una cartuccia: il runtime le gestisce e offre funzioni, un'astrazione il cui valore questa lezione rende evidente.
 DA COMPRENDERE OGGI: polling, interruzioni, DMA.
 Per il docente: Hardware dal README di PRG32 e da docs/hardware. Un interruttore rimbalza per qualche millisecondo quando viene premuto; campionarlo una volta per frame, ogni poche decine di millisecondi, nasconde il rimbalzo.</a:t>
             </a:r>
@@ -1202,7 +1202,7 @@
           <a:p>
             <a:r>
               <a:rPr lang="en-US" dirty="0"/>
-              <a:t>Tre modi di gestire un dispositivo. Polling: il programma chiede al dispositivo, ancora e ancora, se ha qualcosa; semplice, e uno spreco quando non succede nulla. Interruzioni: il dispositivo chiede attenzione quando gli serve, come nella Lezione 19. Accesso diretto alla memoria, DMA: il dispositivo scambia da solo interi blocchi di dati con la memoria, e il processore viene soltanto avvisato quando ha finito. Sul kit sono all'opera tutti e tre: voi interrogate il joystick, il timer interrompe, il display e l'audio sono alimentati in DMA.
+              <a:t>Tre modi di trattare un dispositivo. Polling: il programma chiede ripetutamente al dispositivo se ha qualcosa; semplice, e dispendioso quando non accade nulla. Interruzioni: il dispositivo chiede attenzione quando ne ha bisogno, come nella Lezione 19. Accesso diretto alla memoria: il dispositivo scambia da sé interi blocchi di dati con la memoria, e il processore viene avvisato solo al completamento. Sul kit sono all'opera tutti e tre: il joystick viene interrogato, il timer interrompe, e display e suono sono alimentati dal DMA. La scelta tra di essi bilancia semplicità, prontezza e tempo del processore.
 DA COMPRENDERE OGGI: polling, interruzioni, DMA.
 Per il docente: I/O programmato, I/O a interruzioni e DMA. Sul kit sono all'opera tutti e tre: il vostro gioco interroga il joystick, il timer che cadenza i frame interrompe, il display e l'audio sono alimentati in DMA.</a:t>
             </a:r>
@@ -1292,8 +1292,8 @@
           <a:p>
             <a:r>
               <a:rPr lang="en-US" dirty="0"/>
-              <a:t>Pensate allo schema della pressione di un tasto: che cosa entra nel codificatore, e che cosa ne esce?
-Ricordate la fotografia dei pixel sotto la lente: quanti elementi colorati compongono un pixel?
+              <a:t>Per la prima domanda si considera lo schema della pressione di un tasto: che cosa entra nell'encoder, e che cosa ne esce?
+Per la seconda si ricorda la fotografia dei pixel ingranditi e si conta quanti elementi colorati formano un pixel.
 Per il docente: 1. Risposta: B. Da una posizione decodificata nella matrice dei tasti a un codice compatto di n bit, come il codificatore della Lezione 11.
 2. Risposta: B. Tre sub-pixel, ciascuno una cella di cristalli liquidi dietro un filtro colorato; un TFT in ognuno ne conserva lo stato.</a:t>
             </a:r>
@@ -1383,8 +1383,8 @@
           <a:p>
             <a:r>
               <a:rPr lang="en-US" dirty="0"/>
-              <a:t>La risposta sta in ciò che manca a una matrice passiva: qualcosa, in ogni cella, che ne conservi lo stato mentre si pilotano le altre.
-Chi prende l'iniziativa, il programma o il dispositivo? Nel riscaldamento è il programma, una volta per frame.
+              <a:t>Per la prima domanda la risposta sta in ciò che manca a una matrice passiva: un elemento in ogni cella che ne conservi lo stato mentre le altre vengono pilotate.
+Per la seconda la domanda è chi prende l'iniziativa, il programma o il dispositivo. Nel riscaldamento è il programma, una volta per frame.
 Per il docente: 1. Risposta: B. Persistenza: senza un transistor per pixel, le celle rispondono lentamente e conservano male il proprio stato mentre si scandiscono le altre.
 2. Risposta: C. Il programma interroga periodicamente il dispositivo. Con le interruzioni sarebbe il dispositivo a chiamare il programma.</a:t>
             </a:r>
@@ -1474,7 +1474,7 @@
           <a:p>
             <a:r>
               <a:rPr lang="en-US" dirty="0"/>
-              <a:t>Dieci termini. Cathode-ray tube è il tubo a raggi catodici; backlight è la retroilluminazione. Un pointing device, periferica di puntamento, è qualunque dispositivo che, come il mouse, indica una posizione. Le stampanti dot-matrix e ink-jet sono quelle ad aghi e a getto d'inchiostro. Polling è l'interrogazione ciclica, anche se la parola in uso è quella inglese.</a:t>
+              <a:t>Dieci termini. Un cathode-ray tube è un tubo a raggi catodici; la backlight è la retroilluminazione. Un pointing device è un qualsiasi dispositivo, come il mouse, che indica una posizione. Le stampanti dot-matrix e ink-jet sono ad aghi e a getto d'inchiostro. Il polling è l'interrogazione ciclica, anche se nella pratica prevale il termine inglese.</a:t>
             </a:r>
             <a:endParaRPr lang="en-US" dirty="0"/>
           </a:p>
@@ -1562,7 +1562,7 @@
           <a:p>
             <a:r>
               <a:rPr lang="en-US" dirty="0"/>
-              <a:t>Cinque obiettivi. Descrivere come si forma un'immagine su un tubo a raggi catodici e su un display a cristalli liquidi, e che cosa aggiunge una matrice attiva. Spiegare il percorso della pressione di un tasto: matrice, codificatore, registro a scorrimento, interfaccia seriale. Dire che cosa invia un mouse al calcolatore e con quale frequenza. Descrivere le fasi della stampa laser. Spiegare come il kit legge il joystick, e confrontare tre tecniche: polling, interruzioni e accesso diretto alla memoria.</a:t>
+              <a:t>Cinque risultati di apprendimento. Descrivere come si forma un'immagine su un tubo catodico e su un display a cristalli liquidi, e che cosa aggiunge una matrice attiva. Spiegare il percorso della pressione di un tasto: matrice, encoder, registro a scorrimento, interfaccia seriale. Dire che cosa invia un mouse al calcolatore e con quale frequenza. Descrivere le fasi della stampa laser. E spiegare come il kit legge il suo joystick, confrontando tre tecniche: polling, interruzioni e accesso diretto alla memoria.</a:t>
             </a:r>
             <a:endParaRPr lang="en-US" dirty="0"/>
           </a:p>
@@ -1650,7 +1650,7 @@
           <a:p>
             <a:r>
               <a:rPr lang="en-US" dirty="0"/>
-              <a:t>Cinque conclusioni. I dispositivi di ingresso/uscita sono una parte fondamentale dei calcolatori. La tecnologia dei display è passata da un fascio di elettroni a un transistor dietro ogni pixel. Tastiera, mouse e stampante sono cambiati poco fuori, e dentro sono fatti di codificatori, contatori e registri a scorrimento. Un dispositivo raggiunge il processore tramite un controller e un bus, ed è gestito con il polling, le interruzioni o il DMA. E sul kit l'intera catena, da un interruttore a un pixel, si può seguire istruzione per istruzione. Ora viene l'ultima parte di Verm1.
+              <a:t>Cinque conclusioni. I dispositivi di ingresso/uscita sono una parte fondamentale dei calcolatori. La tecnologia dei display è passata da un fascio di elettroni a un transistor dietro ogni pixel. Tastiera, mouse e stampante sono cambiati poco all'esterno, e all'interno consistono di encoder, contatori e registri a scorrimento. Un dispositivo raggiunge il processore attraverso un controllore e un bus, ed è servito con polling, interruzioni o DMA. E sul kit l'intera catena, da un interruttore a un pixel, si può seguire istruzione per istruzione. Segue l'ultima parte di Verm1.
 Stato di apprendimento, riepilogo. DA COMPRENDERE OGGI: polling, interruzioni, DMA; display CRT e LCD; tastiera e mouse; le stampanti. DA UTILIZZARE OGGI: il programma completo, gli strumenti di PRG32 (si usa, non si studia, in questo corso). DA COMPRENDERE PIÙ AVANTI: niente. Una slide senza etichetta è contesto: una storia, un esempio, una domanda, un esercizio.
 Per il docente: Poi: Verm1, parte 4: il gioco finito. Quindi la sua pubblicazione sul Cartridge Store.</a:t>
             </a:r>
@@ -1740,7 +1740,7 @@
           <a:p>
             <a:r>
               <a:rPr lang="en-US" dirty="0"/>
-              <a:t>Un display grafico è una matrice di punti, i pixel, ciascuno acceso con la propria intensità; un'immagine si compone accendendo e spegnendo i pixel. I primi display mostravano solo caratteri, in bianco e nero. La densità dei pixel dà la risoluzione, i bit per pixel danno il numero di colori, da 256 a sedici milioni e oltre. La dimensione è la lunghezza della diagonale, in pollici. Il display del kit misura 2,8 pollici, con 320 per 240 pixel.
+              <a:t>Un display grafico è una matrice di punti, i pixel, ciascuno acceso con una propria intensità; un'immagine si compone accendendo e spegnendo i pixel. I primi display mostravano solo caratteri, in bianco e nero. La densità dei pixel determina la risoluzione, e i bit per pixel il numero di colori, da 256 a sedici milioni e oltre. La dimensione di un display è la lunghezza della sua diagonale, in pollici. Il display del kit misura 2,8 pollici, con 320 per 240 pixel.
 DA COMPRENDERE OGGI: display CRT e LCD.
 Per il docente: Il display del kit PRG32: 2,8 pollici, 320 per 240 pixel, 65.536 colori.
 Immagini: Macintosh 128k transparency.png, Grm wnr, CC BY-SA 3.0, Wikimedia Commons.</a:t>
@@ -1831,7 +1831,7 @@
           <a:p>
             <a:r>
               <a:rPr lang="en-US" dirty="0"/>
-              <a:t>Il tubo a raggi catodici ha una storia di oltre un secolo. Nasce come strumento di laboratorio con Crookes, negli anni Settanta dell'Ottocento; Braun ne fa un oscilloscopio nel 1897, il suo primo uso pratico; Rosing nel 1907 lo usa per mostrare forme da un segnale ricevuto, la radice della televisione; nel 1934 arriva sul mercato il primo televisore con CRT. Dagli anni Settanta ai Novanta del Novecento è stato il display di ogni terminale e personal computer.
+              <a:t>Il tubo a raggi catodici ha una storia di più di un secolo. Nacque come strumento di laboratorio con Crookes negli anni Settanta dell'Ottocento; Braun ne fece un oscilloscopio nel 1897, la sua prima applicazione pratica; Rosing nel 1907 lo usò per mostrare forme a partire da un segnale ricevuto, l'origine della televisione; e nel 1934 il primo televisore con un tubo catodico arrivò sul mercato. Dagli anni Settanta agli anni Novanta fu il display di ogni terminale e personal computer.
 DA COMPRENDERE OGGI: display CRT e LCD.
 Per il docente: L'ultima riga riassume l'epoca che la presentazione originale illustrava con le immagini di un oscilloscopio e del cabinato di Asteroids (un display vettoriale pilotato da un 6502).</a:t>
             </a:r>
@@ -1921,7 +1921,7 @@
           <a:p>
             <a:r>
               <a:rPr lang="en-US" dirty="0"/>
-              <a:t>Come funziona un CRT. Un catodo, riscaldato fino all'incandescenza, emette elettroni. Un'alta tensione tra catodo e anodo li accelera in un fascio, che altri campi mettono a fuoco. Campi magnetici o elettrici deflettono il fascio, che colpisce un punto dello schermo: la superficie interna è rivestita di fosforo, e il punto si illumina. Facendo scorrere il fascio riga per riga, molte volte al secondo, si dipinge l'intera immagine prima che l'occhio si accorga che i primi punti si sono spenti.
+              <a:t>Il funzionamento di un tubo catodico. Un catodo, riscaldato fino all'incandescenza, emette elettroni. Un'alta tensione tra catodo e anodo li accelera in un fascio, che altri campi mettono a fuoco. Campi magnetici o elettrici deflettono il fascio, che colpisce un punto dello schermo; la superficie interna è rivestita di fosfori, e il punto emette luce. Spazzando il fascio riga per riga, molte volte al secondo, l'intera immagine viene dipinta prima che l'occhio percepisca che i primi punti si sono spenti, contando sulla persistenza della visione.
 DA COMPRENDERE OGGI: display CRT e LCD.
 Per il docente: Lo schema originale aveva le etichette in italiano: griglia, anodo, bobina di deflessione, riscaldatore, catodo, fascio, bobina di focalizzazione, schermo fluorescente.
 Immagini: Tennis For Two on a DuMont Lab Oscilloscope Type 304-A.jpg, Brookhaven National Laboratory, Public domain, Wikimedia Commons.</a:t>
@@ -2012,7 +2012,7 @@
           <a:p>
             <a:r>
               <a:rPr lang="en-US" dirty="0"/>
-              <a:t>I display a cristalli liquidi hanno sostituito il tubo quasi ovunque: immagine migliore, meno ingombro, peso e consumo, meno affaticamento per gli occhi. I cristalli liquidi sono molecole organiche che scorrono come un liquido ma conservano una struttura ordinata. Un campo elettrico ne cambia l'orientamento, e con esso il modo in cui ruotano la polarizzazione della luce che li attraversa. L'immagine utile è l'ultima riga della slide: un cristallo è una valvola per la luce, aperta e chiusa da una tensione.
+              <a:t>I display a cristalli liquidi hanno sostituito il tubo quasi ovunque, offrendo un'immagine migliore, meno ingombro, peso e consumo, e meno affaticamento visivo. I cristalli liquidi sono molecole organiche che scorrono come un liquido conservando però una struttura ordinata. Un campo elettrico ne altera l'orientamento, e con esso il modo in cui ruotano la polarizzazione della luce che li attraversa. L'immagine dell'ultima riga è calzante: un cristallo è una valvola per la luce, aperta e chiusa da una tensione.
 DA COMPRENDERE OGGI: display CRT e LCD.
 Per il docente: LCD: liquid crystal display, display a cristalli liquidi.
 Immagini: TN-LCD-schematic-MS-208kB.png, see the file page, CC BY-SA 3.0, Wikimedia Commons.</a:t>
@@ -2103,7 +2103,7 @@
           <a:p>
             <a:r>
               <a:rPr lang="en-US" dirty="0"/>
-              <a:t>Dentro un pannello ci sono molte celle, ciascuna con i suoi contatti, poste tra due filtri polarizzatori con assi perpendicolari, e una luce dietro. Quando i cristalli di una cella non sono pilotati ruotano la luce, che quindi supera il filtro anteriore; quando sono pilotati la luce viene bloccata. In uno schermo a colori ogni cella è divisa in tre, con un filtro rosso, uno verde e uno blu: sono i sub-pixel della fotografia, e i tre campi di un colore RGB finiscono lì come tre tensioni.
+              <a:t>Un pannello contiene molte celle, ciascuna con i suoi contatti, poste tra due filtri polarizzatori ad assi perpendicolari, con una sorgente di luce dietro. Quando i cristalli di una cella non sono pilotati ruotano la luce, che allora attraversa il filtro anteriore; quando sono pilotati la luce viene bloccata. In uno schermo a colori ogni cella è suddivisa in tre, con filtri rosso, verde e blu: sono i sottopixel visibili nella fotografia, e i tre campi di un colore RGB, dalla Lezione 04, finiscono lì come tre tensioni.
 DA COMPRENDERE OGGI: display CRT e LCD.
 Per il docente: Tre sub-pixel per pixel: i campi R, G e B del colore RGB565 della Lezione 04 finiscono qui, come tre tensioni.
 Immagini: Subpixel rendering LCD photo 3e composite.jpg, ALexL33, CC BY-SA 3.0, Wikimedia Commons.</a:t>
@@ -2194,7 +2194,7 @@
           <a:p>
             <a:r>
               <a:rPr lang="en-US" dirty="0"/>
-              <a:t>Come si pilotano milioni di celle? Una calcolatrice ha un contatto per segmento, cosa impossibile per uno schermo. Una matrice passiva ha contatti per riga e per colonna: si pilota un solo pixel alla volta, e gli altri devono ricordare da soli il proprio stato, cosa che fanno male; da qui scie e diafonia. Una matrice attiva mette un transistor in ogni cella, in un film sottile sul vetro: il transistor conserva lo stato del suo pixel mentre gli altri vengono aggiornati. È il TFT, la tecnologia del display del kit.
+              <a:t>Come si pilotano milioni di celle? Una calcolatrice ha un contatto per segmento, un approccio impossibile alla scala di uno schermo. Una matrice passiva ha contatti per riga e per colonna: si pilota un solo pixel alla volta, e gli altri devono conservare da soli il loro stato, cosa che fanno male, producendo scie e diafonia. Una matrice attiva pone un transistor in ogni cella, in un film sottile sul vetro, e il transistor mantiene lo stato del suo pixel mentre gli altri vengono aggiornati. È il TFT, la tecnologia del display del kit; il transistor funge da memoria di un pixel, un'idea riconoscibile dalla Lezione 13.
 DA COMPRENDERE OGGI: display CRT e LCD.
 Per il docente: TFT: thin-film transistor, transistor a film sottile. Il display del kit è un pannello TFT con un controller ILI9341. Novità rispetto alla presentazione originale: i display OLED, in cui ogni pixel emette luce propria e non serve retroilluminazione.</a:t>
             </a:r>
@@ -2284,7 +2284,7 @@
           <a:p>
             <a:r>
               <a:rPr lang="en-US" dirty="0"/>
-              <a:t>La tastiera deriva da quella della macchina per scrivere ed è il principale dispositivo per immettere caratteri. I suoi tasti sono raggruppati: alfanumerici, speciali, frecce e funzioni. Ricordate un fatto, già incontrato nella lezione precedente: la tastiera e il video non sono collegati tra loro. Quando una lettera che battete compare sullo schermo, è perché un programma ha letto un codice dalla tastiera e ha disegnato un carattere. Oggi le tastiere si collegano via USB o via radio.
+              <a:t>La tastiera deriva da quella della macchina per scrivere ed è il dispositivo principale per inserire caratteri. I suoi tasti si raggruppano in tasti alfanumerici, tasti speciali, frecce e tasti funzione. Un fatto, già incontrato nella lezione precedente, merita di essere ripetuto: tastiera e display non sono collegati tra loro. Quando una lettera digitata compare sullo schermo, è perché un programma ha letto un codice dalla tastiera e ha disegnato un carattere. Oggi le tastiere si collegano via USB o via radio.
 DA COMPRENDERE OGGI: tastiera e mouse.
 Per il docente: PS/2 era il connettore standard prima di USB. L'eco di un tasto sullo schermo è un programma: leggi un codice, disegna un carattere.</a:t>
             </a:r>
@@ -3364,7 +3364,7 @@
                 <a:ea typeface="Calibri" pitchFamily="34" charset="-122"/>
                 <a:cs typeface="Calibri" pitchFamily="34" charset="-120"/>
               </a:rPr>
-              <a:t>21-Architettura_dei_Calcolatori-Ingresso_Uscita-Codice.pptx</a:t>
+              <a:t>21-Architettura_dei_Calcolatori-Ingresso_Uscita-Lab.pptx</a:t>
             </a:r>
             <a:endParaRPr lang="en-US" sz="1300" dirty="0"/>
           </a:p>

--- a/it/slides/21-Architettura_dei_Calcolatori-Ingresso_Uscita.pptx
+++ b/it/slides/21-Architettura_dei_Calcolatori-Ingresso_Uscita.pptx
@@ -126,13 +126,13 @@
   <p:extLst>
     <p:ext uri="{521415D9-36F7-43E2-AB2F-B90AF26B5E84}">
       <p14:sectionLst xmlns:p14="http://schemas.microsoft.com/office/powerpoint/2010/main">
-        <p14:section name="Apertura" id="{b2e05e80-1856-6bd0-f7d5-0756c3989cd6}">
+        <p14:section name="Apertura" id="{7edf63e4-ec55-db16-8df0-225a09a386e0}">
           <p14:sldIdLst>
             <p14:sldId id="256"/>
             <p14:sldId id="257"/>
           </p14:sldIdLst>
         </p14:section>
-        <p14:section name="I display" id="{2384213b-fb53-07e3-05f5-ff33220bef98}">
+        <p14:section name="I display" id="{2d91cb05-b41f-3099-7d43-f1a4db81e416}">
           <p14:sldIdLst>
             <p14:sldId id="258"/>
             <p14:sldId id="259"/>
@@ -142,7 +142,7 @@
             <p14:sldId id="263"/>
           </p14:sldIdLst>
         </p14:section>
-        <p14:section name="Tastiera e mouse" id="{6df7c731-bcff-e8b9-67a0-dc1462c7c451}">
+        <p14:section name="Tastiera e mouse" id="{da23bbb8-9fd5-cd3d-00d2-8606a64c06b5}">
           <p14:sldIdLst>
             <p14:sldId id="264"/>
             <p14:sldId id="265"/>
@@ -150,13 +150,13 @@
             <p14:sldId id="267"/>
           </p14:sldIdLst>
         </p14:section>
-        <p14:section name="Le stampanti" id="{1e0626fa-61c9-ad65-56fc-90a6a4fef1fb}">
+        <p14:section name="Le stampanti" id="{0f848c7a-78ae-cc31-75fb-894cee4a3c19}">
           <p14:sldIdLst>
             <p14:sldId id="268"/>
             <p14:sldId id="269"/>
           </p14:sldIdLst>
         </p14:section>
-        <p14:section name="Ritorno alla macchina" id="{f58da49e-2e95-7609-b91b-9311a035de39}">
+        <p14:section name="Ritorno alla macchina" id="{a84f6937-7de3-154a-54fe-8606cf234112}">
           <p14:sldIdLst>
             <p14:sldId id="270"/>
             <p14:sldId id="271"/>

--- a/it/slides/21-Architettura_dei_Calcolatori-Ingresso_Uscita.pptx
+++ b/it/slides/21-Architettura_dei_Calcolatori-Ingresso_Uscita.pptx
@@ -126,13 +126,13 @@
   <p:extLst>
     <p:ext uri="{521415D9-36F7-43E2-AB2F-B90AF26B5E84}">
       <p14:sectionLst xmlns:p14="http://schemas.microsoft.com/office/powerpoint/2010/main">
-        <p14:section name="Apertura" id="{7edf63e4-ec55-db16-8df0-225a09a386e0}">
+        <p14:section name="Apertura" id="{6ce1b386-500c-9216-f323-2447962fe19e}">
           <p14:sldIdLst>
             <p14:sldId id="256"/>
             <p14:sldId id="257"/>
           </p14:sldIdLst>
         </p14:section>
-        <p14:section name="I display" id="{2d91cb05-b41f-3099-7d43-f1a4db81e416}">
+        <p14:section name="I display" id="{fea4439f-7ac5-e607-ebdc-6ba1000e0a61}">
           <p14:sldIdLst>
             <p14:sldId id="258"/>
             <p14:sldId id="259"/>
@@ -142,7 +142,7 @@
             <p14:sldId id="263"/>
           </p14:sldIdLst>
         </p14:section>
-        <p14:section name="Tastiera e mouse" id="{da23bbb8-9fd5-cd3d-00d2-8606a64c06b5}">
+        <p14:section name="Tastiera e mouse" id="{16dd091a-2d3b-1a1c-b0b4-fb1f89fd6b3d}">
           <p14:sldIdLst>
             <p14:sldId id="264"/>
             <p14:sldId id="265"/>
@@ -150,13 +150,13 @@
             <p14:sldId id="267"/>
           </p14:sldIdLst>
         </p14:section>
-        <p14:section name="Le stampanti" id="{0f848c7a-78ae-cc31-75fb-894cee4a3c19}">
+        <p14:section name="Le stampanti" id="{ba36dc2b-4b75-784d-f55e-34ef6404b3c4}">
           <p14:sldIdLst>
             <p14:sldId id="268"/>
             <p14:sldId id="269"/>
           </p14:sldIdLst>
         </p14:section>
-        <p14:section name="Ritorno alla macchina" id="{a84f6937-7de3-154a-54fe-8606cf234112}">
+        <p14:section name="Ritorno alla macchina" id="{2f012a52-96f1-0142-1e48-4eadb060029b}">
           <p14:sldIdLst>
             <p14:sldId id="270"/>
             <p14:sldId id="271"/>
@@ -573,6 +573,7 @@
               <a:t>Questa lezione riguarda il confine tra la macchina e il mondo: i dispositivi attraverso cui l'informazione entra ed esce. Mostra come si forma un'immagine su uno schermo, che cosa accade tra un tasto e il processore, che cosa comunica un mouse, e come funziona una stampante laser. Il filo conduttore è che ciascuno di questi dispositivi è internamente composto da macchine già progettate in questo corso, encoder, contatori, registri a scorrimento e controllori. La lezione comincia e finisce sul kit, con il dispositivo usato dalla prima sessione di laboratorio: un pulsante.
 Stato di apprendimento: DA COMPRENDERE OGGI, alla fine di questa lezione lo spiegate, lo seguite passo passo e lo applicate da soli; DA UTILIZZARE OGGI, oggi seguite e usate la ricetta; come funziona dentro si spiega più avanti, o non fa parte del corso; DA COMPRENDERE PIÙ AVANTI, riconoscete il nome e lo scopo; lo spiega una lezione successiva. Una slide senza etichetta è contesto: una storia, un esempio, una domanda, un esercizio.
 Stato di apprendimento di questa lezione. DA COMPRENDERE OGGI: polling, interruzioni, DMA; display CRT e LCD; tastiera e mouse; le stampanti. DA UTILIZZARE OGGI: il programma completo, gli strumenti di PRG32 (si usa, non si studia, in questo corso). DA COMPRENDERE PIÙ AVANTI: niente. Una slide senza etichetta è contesto: una storia, un esempio, una domanda, un esercizio.
+Percorso. I risultati di oggi: (1) descrivere come funzionano display, tastiere e stampanti; (2) confrontare il polling con le interruzioni per leggere un dispositivo. Si appoggia su: solo ciò che ha preparato la Lezione 01. Prossimo passo: Lezione 22, Verm1, parte 4: il gioco finito.
 Per il docente: Spirale: gli studenti leggono il joystick fin dai primi laboratori; la lezione si apre chiedendo che cosa c'è dietro prg32_input_read, poi tratta i dispositivi classici e i tre modi in cui un processore può gestirli.</a:t>
             </a:r>
             <a:endParaRPr lang="en-US" dirty="0"/>
@@ -1651,7 +1652,7 @@
             <a:r>
               <a:rPr lang="en-US" dirty="0"/>
               <a:t>Cinque conclusioni. I dispositivi di ingresso/uscita sono una parte fondamentale dei calcolatori. La tecnologia dei display è passata da un fascio di elettroni a un transistor dietro ogni pixel. Tastiera, mouse e stampante sono cambiati poco all'esterno, e all'interno consistono di encoder, contatori e registri a scorrimento. Un dispositivo raggiunge il processore attraverso un controllore e un bus, ed è servito con polling, interruzioni o DMA. E sul kit l'intera catena, da un interruttore a un pixel, si può seguire istruzione per istruzione. Segue l'ultima parte di Verm1.
-Stato di apprendimento, riepilogo. DA COMPRENDERE OGGI: polling, interruzioni, DMA; display CRT e LCD; tastiera e mouse; le stampanti. DA UTILIZZARE OGGI: il programma completo, gli strumenti di PRG32 (si usa, non si studia, in questo corso). DA COMPRENDERE PIÙ AVANTI: niente. Una slide senza etichetta è contesto: una storia, un esempio, una domanda, un esercizio.
+Stato di apprendimento, riepilogo. DA COMPRENDERE OGGI: polling, interruzioni, DMA; display CRT e LCD; tastiera e mouse; le stampanti. DA UTILIZZARE OGGI: il programma completo, gli strumenti di PRG32 (si usa, non si studia, in questo corso). DA COMPRENDERE PIÙ AVANTI: niente. Una slide senza etichetta è contesto: una storia, un esempio, una domanda, un esercizio. Il filo della lezione: Leggere il joystick una volta per frame è polling: semplice, e cieco tra due letture. Prossimo passo: il gioco finito. Biglietto d'uscita (da due a quattro minuti, da soli, su carta): 1. In quattro passi, come trasforma una stampante laser una pagina in toner sulla carta? Perché una stampante ha un proprio processore e una propria memoria? 2. Un gioco legge il joystick una volta per frame, a 30 frame al secondo. Un tocco dura 20 ms e cade tra due letture. Viene visto? Che cosa cambierebbe un'interruzione?
 Per il docente: Poi: Verm1, parte 4: il gioco finito. Quindi la sua pubblicazione sul Cartridge Store.</a:t>
             </a:r>
             <a:endParaRPr lang="en-US" dirty="0"/>
